--- a/タスク管理システム.pptx
+++ b/タスク管理システム.pptx
@@ -345,7 +345,7 @@
           <a:p>
             <a:fld id="{8DC4806F-8A57-40BE-A78D-79608F060769}" type="datetimeFigureOut">
               <a:rPr kumimoji="1" lang="ja-JP" altLang="en-US" smtClean="0"/>
-              <a:t>2026/10/8</a:t>
+              <a:t>2026/10/15</a:t>
             </a:fld>
             <a:endParaRPr kumimoji="1" lang="ja-JP" altLang="en-US"/>
           </a:p>
@@ -692,7 +692,7 @@
           <a:p>
             <a:fld id="{8DC4806F-8A57-40BE-A78D-79608F060769}" type="datetimeFigureOut">
               <a:rPr kumimoji="1" lang="ja-JP" altLang="en-US" smtClean="0"/>
-              <a:t>2026/10/8</a:t>
+              <a:t>2026/10/15</a:t>
             </a:fld>
             <a:endParaRPr kumimoji="1" lang="ja-JP" altLang="en-US"/>
           </a:p>
@@ -1038,7 +1038,7 @@
           <a:p>
             <a:fld id="{8DC4806F-8A57-40BE-A78D-79608F060769}" type="datetimeFigureOut">
               <a:rPr kumimoji="1" lang="ja-JP" altLang="en-US" smtClean="0"/>
-              <a:t>2026/10/8</a:t>
+              <a:t>2026/10/15</a:t>
             </a:fld>
             <a:endParaRPr kumimoji="1" lang="ja-JP" altLang="en-US"/>
           </a:p>
@@ -1333,7 +1333,7 @@
           <a:p>
             <a:fld id="{8DC4806F-8A57-40BE-A78D-79608F060769}" type="datetimeFigureOut">
               <a:rPr kumimoji="1" lang="ja-JP" altLang="en-US" smtClean="0"/>
-              <a:t>2026/10/8</a:t>
+              <a:t>2026/10/15</a:t>
             </a:fld>
             <a:endParaRPr kumimoji="1" lang="ja-JP" altLang="en-US"/>
           </a:p>
@@ -1684,7 +1684,7 @@
           <a:p>
             <a:fld id="{8DC4806F-8A57-40BE-A78D-79608F060769}" type="datetimeFigureOut">
               <a:rPr kumimoji="1" lang="ja-JP" altLang="en-US" smtClean="0"/>
-              <a:t>2026/10/8</a:t>
+              <a:t>2026/10/15</a:t>
             </a:fld>
             <a:endParaRPr kumimoji="1" lang="ja-JP" altLang="en-US"/>
           </a:p>
@@ -2037,7 +2037,7 @@
           <a:p>
             <a:fld id="{8DC4806F-8A57-40BE-A78D-79608F060769}" type="datetimeFigureOut">
               <a:rPr kumimoji="1" lang="ja-JP" altLang="en-US" smtClean="0"/>
-              <a:t>2026/10/8</a:t>
+              <a:t>2026/10/15</a:t>
             </a:fld>
             <a:endParaRPr kumimoji="1" lang="ja-JP" altLang="en-US"/>
           </a:p>
@@ -2378,7 +2378,7 @@
           <a:p>
             <a:fld id="{8DC4806F-8A57-40BE-A78D-79608F060769}" type="datetimeFigureOut">
               <a:rPr kumimoji="1" lang="ja-JP" altLang="en-US" smtClean="0"/>
-              <a:t>2026/10/8</a:t>
+              <a:t>2026/10/15</a:t>
             </a:fld>
             <a:endParaRPr kumimoji="1" lang="ja-JP" altLang="en-US"/>
           </a:p>
@@ -2949,7 +2949,7 @@
           <a:p>
             <a:fld id="{8DC4806F-8A57-40BE-A78D-79608F060769}" type="datetimeFigureOut">
               <a:rPr kumimoji="1" lang="ja-JP" altLang="en-US" smtClean="0"/>
-              <a:t>2026/10/8</a:t>
+              <a:t>2026/10/15</a:t>
             </a:fld>
             <a:endParaRPr kumimoji="1" lang="ja-JP" altLang="en-US"/>
           </a:p>
@@ -3194,7 +3194,7 @@
           <a:p>
             <a:fld id="{8DC4806F-8A57-40BE-A78D-79608F060769}" type="datetimeFigureOut">
               <a:rPr kumimoji="1" lang="ja-JP" altLang="en-US" smtClean="0"/>
-              <a:t>2026/10/8</a:t>
+              <a:t>2026/10/15</a:t>
             </a:fld>
             <a:endParaRPr kumimoji="1" lang="ja-JP" altLang="en-US"/>
           </a:p>
@@ -3585,7 +3585,7 @@
           <a:p>
             <a:fld id="{8DC4806F-8A57-40BE-A78D-79608F060769}" type="datetimeFigureOut">
               <a:rPr kumimoji="1" lang="ja-JP" altLang="en-US" smtClean="0"/>
-              <a:t>2026/10/8</a:t>
+              <a:t>2026/10/15</a:t>
             </a:fld>
             <a:endParaRPr kumimoji="1" lang="ja-JP" altLang="en-US"/>
           </a:p>
@@ -4109,7 +4109,7 @@
           <a:p>
             <a:fld id="{8DC4806F-8A57-40BE-A78D-79608F060769}" type="datetimeFigureOut">
               <a:rPr kumimoji="1" lang="ja-JP" altLang="en-US" smtClean="0"/>
-              <a:t>2026/10/8</a:t>
+              <a:t>2026/10/15</a:t>
             </a:fld>
             <a:endParaRPr kumimoji="1" lang="ja-JP" altLang="en-US"/>
           </a:p>
@@ -4417,7 +4417,7 @@
           <a:p>
             <a:fld id="{8DC4806F-8A57-40BE-A78D-79608F060769}" type="datetimeFigureOut">
               <a:rPr kumimoji="1" lang="ja-JP" altLang="en-US" smtClean="0"/>
-              <a:t>2026/10/8</a:t>
+              <a:t>2026/10/15</a:t>
             </a:fld>
             <a:endParaRPr kumimoji="1" lang="ja-JP" altLang="en-US"/>
           </a:p>
@@ -4752,7 +4752,7 @@
           <a:p>
             <a:fld id="{8DC4806F-8A57-40BE-A78D-79608F060769}" type="datetimeFigureOut">
               <a:rPr kumimoji="1" lang="ja-JP" altLang="en-US" smtClean="0"/>
-              <a:t>2026/10/8</a:t>
+              <a:t>2026/10/15</a:t>
             </a:fld>
             <a:endParaRPr kumimoji="1" lang="ja-JP" altLang="en-US"/>
           </a:p>
@@ -5097,7 +5097,7 @@
           <a:p>
             <a:fld id="{8DC4806F-8A57-40BE-A78D-79608F060769}" type="datetimeFigureOut">
               <a:rPr kumimoji="1" lang="ja-JP" altLang="en-US" smtClean="0"/>
-              <a:t>2026/10/8</a:t>
+              <a:t>2026/10/15</a:t>
             </a:fld>
             <a:endParaRPr kumimoji="1" lang="ja-JP" altLang="en-US"/>
           </a:p>
@@ -5350,7 +5350,7 @@
           <a:p>
             <a:fld id="{8DC4806F-8A57-40BE-A78D-79608F060769}" type="datetimeFigureOut">
               <a:rPr kumimoji="1" lang="ja-JP" altLang="en-US" smtClean="0"/>
-              <a:t>2026/10/8</a:t>
+              <a:t>2026/10/15</a:t>
             </a:fld>
             <a:endParaRPr kumimoji="1" lang="ja-JP" altLang="en-US"/>
           </a:p>
@@ -5737,7 +5737,7 @@
           <a:p>
             <a:fld id="{8DC4806F-8A57-40BE-A78D-79608F060769}" type="datetimeFigureOut">
               <a:rPr kumimoji="1" lang="ja-JP" altLang="en-US" smtClean="0"/>
-              <a:t>2026/10/8</a:t>
+              <a:t>2026/10/15</a:t>
             </a:fld>
             <a:endParaRPr kumimoji="1" lang="ja-JP" altLang="en-US"/>
           </a:p>
@@ -6265,7 +6265,7 @@
           <a:p>
             <a:fld id="{8DC4806F-8A57-40BE-A78D-79608F060769}" type="datetimeFigureOut">
               <a:rPr kumimoji="1" lang="ja-JP" altLang="en-US" smtClean="0"/>
-              <a:t>2026/10/8</a:t>
+              <a:t>2026/10/15</a:t>
             </a:fld>
             <a:endParaRPr kumimoji="1" lang="ja-JP" altLang="en-US"/>
           </a:p>
@@ -6378,7 +6378,7 @@
           <a:p>
             <a:fld id="{8DC4806F-8A57-40BE-A78D-79608F060769}" type="datetimeFigureOut">
               <a:rPr kumimoji="1" lang="ja-JP" altLang="en-US" smtClean="0"/>
-              <a:t>2026/10/8</a:t>
+              <a:t>2026/10/15</a:t>
             </a:fld>
             <a:endParaRPr kumimoji="1" lang="ja-JP" altLang="en-US"/>
           </a:p>
@@ -6611,7 +6611,7 @@
           <a:p>
             <a:fld id="{8DC4806F-8A57-40BE-A78D-79608F060769}" type="datetimeFigureOut">
               <a:rPr kumimoji="1" lang="ja-JP" altLang="en-US" smtClean="0"/>
-              <a:t>2026/10/8</a:t>
+              <a:t>2026/10/15</a:t>
             </a:fld>
             <a:endParaRPr kumimoji="1" lang="ja-JP" altLang="en-US"/>
           </a:p>
@@ -7045,7 +7045,7 @@
           <a:p>
             <a:fld id="{8DC4806F-8A57-40BE-A78D-79608F060769}" type="datetimeFigureOut">
               <a:rPr kumimoji="1" lang="ja-JP" altLang="en-US" smtClean="0"/>
-              <a:t>2026/10/8</a:t>
+              <a:t>2026/10/15</a:t>
             </a:fld>
             <a:endParaRPr kumimoji="1" lang="ja-JP" altLang="en-US"/>
           </a:p>
@@ -7365,7 +7365,7 @@
           <a:p>
             <a:fld id="{8DC4806F-8A57-40BE-A78D-79608F060769}" type="datetimeFigureOut">
               <a:rPr kumimoji="1" lang="ja-JP" altLang="en-US" smtClean="0"/>
-              <a:t>2026/10/8</a:t>
+              <a:t>2026/10/15</a:t>
             </a:fld>
             <a:endParaRPr kumimoji="1" lang="ja-JP" altLang="en-US"/>
           </a:p>
@@ -7666,7 +7666,7 @@
           <a:p>
             <a:fld id="{8DC4806F-8A57-40BE-A78D-79608F060769}" type="datetimeFigureOut">
               <a:rPr kumimoji="1" lang="ja-JP" altLang="en-US" smtClean="0"/>
-              <a:t>2026/10/8</a:t>
+              <a:t>2026/10/15</a:t>
             </a:fld>
             <a:endParaRPr kumimoji="1" lang="ja-JP" altLang="en-US"/>
           </a:p>
@@ -7954,7 +7954,7 @@
           <a:p>
             <a:fld id="{8DC4806F-8A57-40BE-A78D-79608F060769}" type="datetimeFigureOut">
               <a:rPr kumimoji="1" lang="ja-JP" altLang="en-US" smtClean="0"/>
-              <a:t>2026/10/8</a:t>
+              <a:t>2026/10/15</a:t>
             </a:fld>
             <a:endParaRPr kumimoji="1" lang="ja-JP" altLang="en-US"/>
           </a:p>
@@ -8301,7 +8301,7 @@
           <a:p>
             <a:fld id="{8DC4806F-8A57-40BE-A78D-79608F060769}" type="datetimeFigureOut">
               <a:rPr kumimoji="1" lang="ja-JP" altLang="en-US" smtClean="0"/>
-              <a:t>2026/10/8</a:t>
+              <a:t>2026/10/15</a:t>
             </a:fld>
             <a:endParaRPr kumimoji="1" lang="ja-JP" altLang="en-US"/>
           </a:p>
@@ -8734,7 +8734,7 @@
           <a:p>
             <a:fld id="{8DC4806F-8A57-40BE-A78D-79608F060769}" type="datetimeFigureOut">
               <a:rPr kumimoji="1" lang="ja-JP" altLang="en-US" smtClean="0"/>
-              <a:t>2026/10/8</a:t>
+              <a:t>2026/10/15</a:t>
             </a:fld>
             <a:endParaRPr kumimoji="1" lang="ja-JP" altLang="en-US"/>
           </a:p>
@@ -9074,7 +9074,7 @@
           <a:p>
             <a:fld id="{8DC4806F-8A57-40BE-A78D-79608F060769}" type="datetimeFigureOut">
               <a:rPr kumimoji="1" lang="ja-JP" altLang="en-US" smtClean="0"/>
-              <a:t>2026/10/8</a:t>
+              <a:t>2026/10/15</a:t>
             </a:fld>
             <a:endParaRPr kumimoji="1" lang="ja-JP" altLang="en-US"/>
           </a:p>
@@ -9457,7 +9457,7 @@
           <a:p>
             <a:fld id="{8DC4806F-8A57-40BE-A78D-79608F060769}" type="datetimeFigureOut">
               <a:rPr kumimoji="1" lang="ja-JP" altLang="en-US" smtClean="0"/>
-              <a:t>2026/10/8</a:t>
+              <a:t>2026/10/15</a:t>
             </a:fld>
             <a:endParaRPr kumimoji="1" lang="ja-JP" altLang="en-US"/>
           </a:p>
@@ -9836,7 +9836,7 @@
           <a:p>
             <a:fld id="{8DC4806F-8A57-40BE-A78D-79608F060769}" type="datetimeFigureOut">
               <a:rPr kumimoji="1" lang="ja-JP" altLang="en-US" smtClean="0"/>
-              <a:t>2026/10/8</a:t>
+              <a:t>2026/10/15</a:t>
             </a:fld>
             <a:endParaRPr kumimoji="1" lang="ja-JP" altLang="en-US"/>
           </a:p>
@@ -10708,10 +10708,10 @@
       </p:sp>
       <p:grpSp>
         <p:nvGrpSpPr>
-          <p:cNvPr id="9" name="グループ化 8">
-            <a:extLst>
-              <a:ext uri="{FF2B5EF4-FFF2-40B4-BE49-F238E27FC236}">
-                <a16:creationId xmlns:a16="http://schemas.microsoft.com/office/drawing/2014/main" id="{2C2F917E-7E13-2EA1-66CE-87A469444018}"/>
+          <p:cNvPr id="19" name="グループ化 18">
+            <a:extLst>
+              <a:ext uri="{FF2B5EF4-FFF2-40B4-BE49-F238E27FC236}">
+                <a16:creationId xmlns:a16="http://schemas.microsoft.com/office/drawing/2014/main" id="{73C00760-5EF6-148D-122A-3FE820E75315}"/>
               </a:ext>
             </a:extLst>
           </p:cNvPr>
@@ -10726,42 +10726,244 @@
             <a:chExt cx="11096090" cy="5546877"/>
           </a:xfrm>
         </p:grpSpPr>
-        <p:pic>
-          <p:nvPicPr>
-            <p:cNvPr id="4" name="図 3">
+        <p:grpSp>
+          <p:nvGrpSpPr>
+            <p:cNvPr id="9" name="グループ化 8">
               <a:extLst>
                 <a:ext uri="{FF2B5EF4-FFF2-40B4-BE49-F238E27FC236}">
-                  <a16:creationId xmlns:a16="http://schemas.microsoft.com/office/drawing/2014/main" id="{4610A557-8FC7-1CF5-96D7-215C29CCA787}"/>
+                  <a16:creationId xmlns:a16="http://schemas.microsoft.com/office/drawing/2014/main" id="{2C2F917E-7E13-2EA1-66CE-87A469444018}"/>
                 </a:ext>
               </a:extLst>
             </p:cNvPr>
-            <p:cNvPicPr>
-              <a:picLocks noChangeAspect="1"/>
-            </p:cNvPicPr>
+            <p:cNvGrpSpPr/>
             <p:nvPr/>
-          </p:nvPicPr>
-          <p:blipFill>
-            <a:blip r:embed="rId2"/>
-            <a:stretch>
-              <a:fillRect/>
-            </a:stretch>
-          </p:blipFill>
-          <p:spPr>
+          </p:nvGrpSpPr>
+          <p:grpSpPr>
             <a:xfrm>
               <a:off x="729465" y="1100503"/>
-              <a:ext cx="8620018" cy="5546877"/>
+              <a:ext cx="11096090" cy="5546877"/>
+              <a:chOff x="729465" y="1100503"/>
+              <a:chExt cx="11096090" cy="5546877"/>
             </a:xfrm>
-            <a:prstGeom prst="rect">
-              <a:avLst/>
-            </a:prstGeom>
-          </p:spPr>
-        </p:pic>
+          </p:grpSpPr>
+          <p:pic>
+            <p:nvPicPr>
+              <p:cNvPr id="4" name="図 3">
+                <a:extLst>
+                  <a:ext uri="{FF2B5EF4-FFF2-40B4-BE49-F238E27FC236}">
+                    <a16:creationId xmlns:a16="http://schemas.microsoft.com/office/drawing/2014/main" id="{4610A557-8FC7-1CF5-96D7-215C29CCA787}"/>
+                  </a:ext>
+                </a:extLst>
+              </p:cNvPr>
+              <p:cNvPicPr>
+                <a:picLocks noChangeAspect="1"/>
+              </p:cNvPicPr>
+              <p:nvPr/>
+            </p:nvPicPr>
+            <p:blipFill>
+              <a:blip r:embed="rId2"/>
+              <a:stretch>
+                <a:fillRect/>
+              </a:stretch>
+            </p:blipFill>
+            <p:spPr>
+              <a:xfrm>
+                <a:off x="729465" y="1100503"/>
+                <a:ext cx="8620018" cy="5546877"/>
+              </a:xfrm>
+              <a:prstGeom prst="rect">
+                <a:avLst/>
+              </a:prstGeom>
+            </p:spPr>
+          </p:pic>
+          <p:sp>
+            <p:nvSpPr>
+              <p:cNvPr id="7" name="吹き出し: 角を丸めた四角形 6">
+                <a:extLst>
+                  <a:ext uri="{FF2B5EF4-FFF2-40B4-BE49-F238E27FC236}">
+                    <a16:creationId xmlns:a16="http://schemas.microsoft.com/office/drawing/2014/main" id="{AD3E790E-5A2B-DA0F-3BB1-D1061BB181D8}"/>
+                  </a:ext>
+                </a:extLst>
+              </p:cNvPr>
+              <p:cNvSpPr/>
+              <p:nvPr/>
+            </p:nvSpPr>
+            <p:spPr>
+              <a:xfrm>
+                <a:off x="7356296" y="2866490"/>
+                <a:ext cx="4469259" cy="2342508"/>
+              </a:xfrm>
+              <a:prstGeom prst="wedgeRoundRectCallout">
+                <a:avLst>
+                  <a:gd name="adj1" fmla="val -65661"/>
+                  <a:gd name="adj2" fmla="val 31798"/>
+                  <a:gd name="adj3" fmla="val 16667"/>
+                </a:avLst>
+              </a:prstGeom>
+              <a:solidFill>
+                <a:schemeClr val="bg1">
+                  <a:lumMod val="95000"/>
+                </a:schemeClr>
+              </a:solidFill>
+              <a:ln w="38100">
+                <a:solidFill>
+                  <a:schemeClr val="accent1"/>
+                </a:solidFill>
+              </a:ln>
+            </p:spPr>
+            <p:style>
+              <a:lnRef idx="2">
+                <a:schemeClr val="accent1">
+                  <a:shade val="15000"/>
+                </a:schemeClr>
+              </a:lnRef>
+              <a:fillRef idx="1">
+                <a:schemeClr val="accent1"/>
+              </a:fillRef>
+              <a:effectRef idx="0">
+                <a:schemeClr val="accent1"/>
+              </a:effectRef>
+              <a:fontRef idx="minor">
+                <a:schemeClr val="lt1"/>
+              </a:fontRef>
+            </p:style>
+            <p:txBody>
+              <a:bodyPr rtlCol="0" anchor="ctr"/>
+              <a:lstStyle/>
+              <a:p>
+                <a:pPr algn="ctr"/>
+                <a:r>
+                  <a:rPr kumimoji="1" lang="ja-JP" altLang="en-US" sz="2800" dirty="0">
+                    <a:solidFill>
+                      <a:schemeClr val="tx1"/>
+                    </a:solidFill>
+                    <a:latin typeface="HGP創英角ﾎﾟｯﾌﾟ体" panose="040B0A00000000000000" pitchFamily="50" charset="-128"/>
+                    <a:ea typeface="HGP創英角ﾎﾟｯﾌﾟ体" panose="040B0A00000000000000" pitchFamily="50" charset="-128"/>
+                  </a:rPr>
+                  <a:t>優先度・ステータスを</a:t>
+                </a:r>
+                <a:endParaRPr kumimoji="1" lang="en-US" altLang="ja-JP" sz="2800" dirty="0">
+                  <a:solidFill>
+                    <a:schemeClr val="tx1"/>
+                  </a:solidFill>
+                  <a:latin typeface="HGP創英角ﾎﾟｯﾌﾟ体" panose="040B0A00000000000000" pitchFamily="50" charset="-128"/>
+                  <a:ea typeface="HGP創英角ﾎﾟｯﾌﾟ体" panose="040B0A00000000000000" pitchFamily="50" charset="-128"/>
+                </a:endParaRPr>
+              </a:p>
+              <a:p>
+                <a:pPr algn="ctr"/>
+                <a:r>
+                  <a:rPr kumimoji="1" lang="ja-JP" altLang="en-US" sz="2800" dirty="0">
+                    <a:solidFill>
+                      <a:schemeClr val="tx1"/>
+                    </a:solidFill>
+                    <a:latin typeface="HGP創英角ﾎﾟｯﾌﾟ体" panose="040B0A00000000000000" pitchFamily="50" charset="-128"/>
+                    <a:ea typeface="HGP創英角ﾎﾟｯﾌﾟ体" panose="040B0A00000000000000" pitchFamily="50" charset="-128"/>
+                  </a:rPr>
+                  <a:t>登録するのがポイント💡</a:t>
+                </a:r>
+                <a:endParaRPr kumimoji="1" lang="en-US" altLang="ja-JP" sz="2800" dirty="0">
+                  <a:solidFill>
+                    <a:schemeClr val="tx1"/>
+                  </a:solidFill>
+                  <a:latin typeface="HGP創英角ﾎﾟｯﾌﾟ体" panose="040B0A00000000000000" pitchFamily="50" charset="-128"/>
+                  <a:ea typeface="HGP創英角ﾎﾟｯﾌﾟ体" panose="040B0A00000000000000" pitchFamily="50" charset="-128"/>
+                </a:endParaRPr>
+              </a:p>
+              <a:p>
+                <a:pPr algn="ctr"/>
+                <a:r>
+                  <a:rPr kumimoji="1" lang="ja-JP" altLang="en-US" sz="2400" dirty="0">
+                    <a:solidFill>
+                      <a:schemeClr val="tx1"/>
+                    </a:solidFill>
+                    <a:latin typeface="HGP創英角ﾎﾟｯﾌﾟ体" panose="040B0A00000000000000" pitchFamily="50" charset="-128"/>
+                    <a:ea typeface="HGP創英角ﾎﾟｯﾌﾟ体" panose="040B0A00000000000000" pitchFamily="50" charset="-128"/>
+                  </a:rPr>
+                  <a:t>タスクの進行状況や</a:t>
+                </a:r>
+                <a:endParaRPr kumimoji="1" lang="en-US" altLang="ja-JP" sz="2400" dirty="0">
+                  <a:solidFill>
+                    <a:schemeClr val="tx1"/>
+                  </a:solidFill>
+                  <a:latin typeface="HGP創英角ﾎﾟｯﾌﾟ体" panose="040B0A00000000000000" pitchFamily="50" charset="-128"/>
+                  <a:ea typeface="HGP創英角ﾎﾟｯﾌﾟ体" panose="040B0A00000000000000" pitchFamily="50" charset="-128"/>
+                </a:endParaRPr>
+              </a:p>
+              <a:p>
+                <a:pPr algn="ctr"/>
+                <a:r>
+                  <a:rPr kumimoji="1" lang="ja-JP" altLang="en-US" sz="2400" dirty="0">
+                    <a:solidFill>
+                      <a:schemeClr val="tx1"/>
+                    </a:solidFill>
+                    <a:latin typeface="HGP創英角ﾎﾟｯﾌﾟ体" panose="040B0A00000000000000" pitchFamily="50" charset="-128"/>
+                    <a:ea typeface="HGP創英角ﾎﾟｯﾌﾟ体" panose="040B0A00000000000000" pitchFamily="50" charset="-128"/>
+                  </a:rPr>
+                  <a:t>優先順位を把握できる！</a:t>
+                </a:r>
+              </a:p>
+            </p:txBody>
+          </p:sp>
+          <p:sp>
+            <p:nvSpPr>
+              <p:cNvPr id="8" name="正方形/長方形 7">
+                <a:extLst>
+                  <a:ext uri="{FF2B5EF4-FFF2-40B4-BE49-F238E27FC236}">
+                    <a16:creationId xmlns:a16="http://schemas.microsoft.com/office/drawing/2014/main" id="{58CDF62D-A3F5-D0C6-C405-95DA3AE26D94}"/>
+                  </a:ext>
+                </a:extLst>
+              </p:cNvPr>
+              <p:cNvSpPr/>
+              <p:nvPr/>
+            </p:nvSpPr>
+            <p:spPr>
+              <a:xfrm>
+                <a:off x="8096036" y="1993187"/>
+                <a:ext cx="1017142" cy="791110"/>
+              </a:xfrm>
+              <a:prstGeom prst="rect">
+                <a:avLst/>
+              </a:prstGeom>
+              <a:solidFill>
+                <a:schemeClr val="bg1"/>
+              </a:solidFill>
+              <a:ln>
+                <a:noFill/>
+              </a:ln>
+            </p:spPr>
+            <p:style>
+              <a:lnRef idx="2">
+                <a:schemeClr val="accent1">
+                  <a:shade val="15000"/>
+                </a:schemeClr>
+              </a:lnRef>
+              <a:fillRef idx="1">
+                <a:schemeClr val="accent1"/>
+              </a:fillRef>
+              <a:effectRef idx="0">
+                <a:schemeClr val="accent1"/>
+              </a:effectRef>
+              <a:fontRef idx="minor">
+                <a:schemeClr val="lt1"/>
+              </a:fontRef>
+            </p:style>
+            <p:txBody>
+              <a:bodyPr rtlCol="0" anchor="ctr"/>
+              <a:lstStyle/>
+              <a:p>
+                <a:pPr algn="ctr"/>
+                <a:endParaRPr kumimoji="1" lang="ja-JP" altLang="en-US"/>
+              </a:p>
+            </p:txBody>
+          </p:sp>
+        </p:grpSp>
         <p:sp>
           <p:nvSpPr>
-            <p:cNvPr id="7" name="吹き出し: 角を丸めた四角形 6">
+            <p:cNvPr id="2" name="正方形/長方形 1">
               <a:extLst>
                 <a:ext uri="{FF2B5EF4-FFF2-40B4-BE49-F238E27FC236}">
-                  <a16:creationId xmlns:a16="http://schemas.microsoft.com/office/drawing/2014/main" id="{AD3E790E-5A2B-DA0F-3BB1-D1061BB181D8}"/>
+                  <a16:creationId xmlns:a16="http://schemas.microsoft.com/office/drawing/2014/main" id="{CD0CAB93-C8B1-E903-B0D8-C2A350301D0E}"/>
                 </a:ext>
               </a:extLst>
             </p:cNvPr>
@@ -10770,25 +10972,17 @@
           </p:nvSpPr>
           <p:spPr>
             <a:xfrm>
-              <a:off x="7356296" y="2866490"/>
-              <a:ext cx="4469259" cy="2342508"/>
+              <a:off x="2938410" y="4469258"/>
+              <a:ext cx="1315092" cy="195209"/>
             </a:xfrm>
-            <a:prstGeom prst="wedgeRoundRectCallout">
-              <a:avLst>
-                <a:gd name="adj1" fmla="val -65661"/>
-                <a:gd name="adj2" fmla="val 31798"/>
-                <a:gd name="adj3" fmla="val 16667"/>
-              </a:avLst>
+            <a:prstGeom prst="rect">
+              <a:avLst/>
             </a:prstGeom>
             <a:solidFill>
-              <a:schemeClr val="bg1">
-                <a:lumMod val="95000"/>
-              </a:schemeClr>
+              <a:schemeClr val="bg1"/>
             </a:solidFill>
-            <a:ln w="38100">
-              <a:solidFill>
-                <a:schemeClr val="accent1"/>
-              </a:solidFill>
+            <a:ln>
+              <a:noFill/>
             </a:ln>
           </p:spPr>
           <p:style>
@@ -10812,85 +11006,16 @@
             <a:lstStyle/>
             <a:p>
               <a:pPr algn="ctr"/>
-              <a:r>
-                <a:rPr kumimoji="1" lang="ja-JP" altLang="en-US" sz="2800" dirty="0">
-                  <a:solidFill>
-                    <a:schemeClr val="tx1"/>
-                  </a:solidFill>
-                  <a:latin typeface="HGP創英角ﾎﾟｯﾌﾟ体" panose="040B0A00000000000000" pitchFamily="50" charset="-128"/>
-                  <a:ea typeface="HGP創英角ﾎﾟｯﾌﾟ体" panose="040B0A00000000000000" pitchFamily="50" charset="-128"/>
-                </a:rPr>
-                <a:t>優先度・ステータスを</a:t>
-              </a:r>
-              <a:endParaRPr kumimoji="1" lang="en-US" altLang="ja-JP" sz="2800" dirty="0">
-                <a:solidFill>
-                  <a:schemeClr val="tx1"/>
-                </a:solidFill>
-                <a:latin typeface="HGP創英角ﾎﾟｯﾌﾟ体" panose="040B0A00000000000000" pitchFamily="50" charset="-128"/>
-                <a:ea typeface="HGP創英角ﾎﾟｯﾌﾟ体" panose="040B0A00000000000000" pitchFamily="50" charset="-128"/>
-              </a:endParaRPr>
-            </a:p>
-            <a:p>
-              <a:pPr algn="ctr"/>
-              <a:r>
-                <a:rPr kumimoji="1" lang="ja-JP" altLang="en-US" sz="2800" dirty="0">
-                  <a:solidFill>
-                    <a:schemeClr val="tx1"/>
-                  </a:solidFill>
-                  <a:latin typeface="HGP創英角ﾎﾟｯﾌﾟ体" panose="040B0A00000000000000" pitchFamily="50" charset="-128"/>
-                  <a:ea typeface="HGP創英角ﾎﾟｯﾌﾟ体" panose="040B0A00000000000000" pitchFamily="50" charset="-128"/>
-                </a:rPr>
-                <a:t>登録するのがポイント💡</a:t>
-              </a:r>
-              <a:endParaRPr kumimoji="1" lang="en-US" altLang="ja-JP" sz="2800" dirty="0">
-                <a:solidFill>
-                  <a:schemeClr val="tx1"/>
-                </a:solidFill>
-                <a:latin typeface="HGP創英角ﾎﾟｯﾌﾟ体" panose="040B0A00000000000000" pitchFamily="50" charset="-128"/>
-                <a:ea typeface="HGP創英角ﾎﾟｯﾌﾟ体" panose="040B0A00000000000000" pitchFamily="50" charset="-128"/>
-              </a:endParaRPr>
-            </a:p>
-            <a:p>
-              <a:pPr algn="ctr"/>
-              <a:r>
-                <a:rPr kumimoji="1" lang="ja-JP" altLang="en-US" sz="2400" dirty="0">
-                  <a:solidFill>
-                    <a:schemeClr val="tx1"/>
-                  </a:solidFill>
-                  <a:latin typeface="HGP創英角ﾎﾟｯﾌﾟ体" panose="040B0A00000000000000" pitchFamily="50" charset="-128"/>
-                  <a:ea typeface="HGP創英角ﾎﾟｯﾌﾟ体" panose="040B0A00000000000000" pitchFamily="50" charset="-128"/>
-                </a:rPr>
-                <a:t>タスクの進行状況や</a:t>
-              </a:r>
-              <a:endParaRPr kumimoji="1" lang="en-US" altLang="ja-JP" sz="2400" dirty="0">
-                <a:solidFill>
-                  <a:schemeClr val="tx1"/>
-                </a:solidFill>
-                <a:latin typeface="HGP創英角ﾎﾟｯﾌﾟ体" panose="040B0A00000000000000" pitchFamily="50" charset="-128"/>
-                <a:ea typeface="HGP創英角ﾎﾟｯﾌﾟ体" panose="040B0A00000000000000" pitchFamily="50" charset="-128"/>
-              </a:endParaRPr>
-            </a:p>
-            <a:p>
-              <a:pPr algn="ctr"/>
-              <a:r>
-                <a:rPr kumimoji="1" lang="ja-JP" altLang="en-US" sz="2400" dirty="0">
-                  <a:solidFill>
-                    <a:schemeClr val="tx1"/>
-                  </a:solidFill>
-                  <a:latin typeface="HGP創英角ﾎﾟｯﾌﾟ体" panose="040B0A00000000000000" pitchFamily="50" charset="-128"/>
-                  <a:ea typeface="HGP創英角ﾎﾟｯﾌﾟ体" panose="040B0A00000000000000" pitchFamily="50" charset="-128"/>
-                </a:rPr>
-                <a:t>優先順位を把握できる！</a:t>
-              </a:r>
+              <a:endParaRPr kumimoji="1" lang="ja-JP" altLang="en-US"/>
             </a:p>
           </p:txBody>
         </p:sp>
         <p:sp>
           <p:nvSpPr>
-            <p:cNvPr id="8" name="正方形/長方形 7">
+            <p:cNvPr id="5" name="正方形/長方形 4">
               <a:extLst>
                 <a:ext uri="{FF2B5EF4-FFF2-40B4-BE49-F238E27FC236}">
-                  <a16:creationId xmlns:a16="http://schemas.microsoft.com/office/drawing/2014/main" id="{58CDF62D-A3F5-D0C6-C405-95DA3AE26D94}"/>
+                  <a16:creationId xmlns:a16="http://schemas.microsoft.com/office/drawing/2014/main" id="{25849CF1-1D28-7FF6-D9B9-324F6A8EB74A}"/>
                 </a:ext>
               </a:extLst>
             </p:cNvPr>
@@ -10899,8 +11024,60 @@
           </p:nvSpPr>
           <p:spPr>
             <a:xfrm>
-              <a:off x="8096036" y="1993187"/>
-              <a:ext cx="1017142" cy="791110"/>
+              <a:off x="2946972" y="2556552"/>
+              <a:ext cx="2405864" cy="556518"/>
+            </a:xfrm>
+            <a:prstGeom prst="rect">
+              <a:avLst/>
+            </a:prstGeom>
+            <a:solidFill>
+              <a:schemeClr val="bg1"/>
+            </a:solidFill>
+            <a:ln>
+              <a:noFill/>
+            </a:ln>
+          </p:spPr>
+          <p:style>
+            <a:lnRef idx="2">
+              <a:schemeClr val="accent1">
+                <a:shade val="15000"/>
+              </a:schemeClr>
+            </a:lnRef>
+            <a:fillRef idx="1">
+              <a:schemeClr val="accent1"/>
+            </a:fillRef>
+            <a:effectRef idx="0">
+              <a:schemeClr val="accent1"/>
+            </a:effectRef>
+            <a:fontRef idx="minor">
+              <a:schemeClr val="lt1"/>
+            </a:fontRef>
+          </p:style>
+          <p:txBody>
+            <a:bodyPr rtlCol="0" anchor="ctr"/>
+            <a:lstStyle/>
+            <a:p>
+              <a:pPr algn="ctr"/>
+              <a:endParaRPr kumimoji="1" lang="ja-JP" altLang="en-US"/>
+            </a:p>
+          </p:txBody>
+        </p:sp>
+        <p:sp>
+          <p:nvSpPr>
+            <p:cNvPr id="11" name="正方形/長方形 10">
+              <a:extLst>
+                <a:ext uri="{FF2B5EF4-FFF2-40B4-BE49-F238E27FC236}">
+                  <a16:creationId xmlns:a16="http://schemas.microsoft.com/office/drawing/2014/main" id="{E314C553-C5D4-2E69-104A-C95CD0F9A54E}"/>
+                </a:ext>
+              </a:extLst>
+            </p:cNvPr>
+            <p:cNvSpPr/>
+            <p:nvPr/>
+          </p:nvSpPr>
+          <p:spPr>
+            <a:xfrm>
+              <a:off x="2946972" y="1940103"/>
+              <a:ext cx="1315092" cy="195209"/>
             </a:xfrm>
             <a:prstGeom prst="rect">
               <a:avLst/>

--- a/タスク管理システム.pptx
+++ b/タスク管理システム.pptx
@@ -6,11 +6,13 @@
   </p:sldMasterIdLst>
   <p:sldIdLst>
     <p:sldId id="256" r:id="rId2"/>
-    <p:sldId id="257" r:id="rId3"/>
-    <p:sldId id="258" r:id="rId4"/>
-    <p:sldId id="259" r:id="rId5"/>
-    <p:sldId id="261" r:id="rId6"/>
-    <p:sldId id="260" r:id="rId7"/>
+    <p:sldId id="264" r:id="rId3"/>
+    <p:sldId id="257" r:id="rId4"/>
+    <p:sldId id="258" r:id="rId5"/>
+    <p:sldId id="259" r:id="rId6"/>
+    <p:sldId id="261" r:id="rId7"/>
+    <p:sldId id="263" r:id="rId8"/>
+    <p:sldId id="260" r:id="rId9"/>
   </p:sldIdLst>
   <p:sldSz cx="12192000" cy="6858000"/>
   <p:notesSz cx="6858000" cy="9144000"/>
@@ -345,7 +347,7 @@
           <a:p>
             <a:fld id="{8DC4806F-8A57-40BE-A78D-79608F060769}" type="datetimeFigureOut">
               <a:rPr kumimoji="1" lang="ja-JP" altLang="en-US" smtClean="0"/>
-              <a:t>2026/10/15</a:t>
+              <a:t>2026/10/20</a:t>
             </a:fld>
             <a:endParaRPr kumimoji="1" lang="ja-JP" altLang="en-US"/>
           </a:p>
@@ -692,7 +694,7 @@
           <a:p>
             <a:fld id="{8DC4806F-8A57-40BE-A78D-79608F060769}" type="datetimeFigureOut">
               <a:rPr kumimoji="1" lang="ja-JP" altLang="en-US" smtClean="0"/>
-              <a:t>2026/10/15</a:t>
+              <a:t>2026/10/20</a:t>
             </a:fld>
             <a:endParaRPr kumimoji="1" lang="ja-JP" altLang="en-US"/>
           </a:p>
@@ -1038,7 +1040,7 @@
           <a:p>
             <a:fld id="{8DC4806F-8A57-40BE-A78D-79608F060769}" type="datetimeFigureOut">
               <a:rPr kumimoji="1" lang="ja-JP" altLang="en-US" smtClean="0"/>
-              <a:t>2026/10/15</a:t>
+              <a:t>2026/10/20</a:t>
             </a:fld>
             <a:endParaRPr kumimoji="1" lang="ja-JP" altLang="en-US"/>
           </a:p>
@@ -1333,7 +1335,7 @@
           <a:p>
             <a:fld id="{8DC4806F-8A57-40BE-A78D-79608F060769}" type="datetimeFigureOut">
               <a:rPr kumimoji="1" lang="ja-JP" altLang="en-US" smtClean="0"/>
-              <a:t>2026/10/15</a:t>
+              <a:t>2026/10/20</a:t>
             </a:fld>
             <a:endParaRPr kumimoji="1" lang="ja-JP" altLang="en-US"/>
           </a:p>
@@ -1684,7 +1686,7 @@
           <a:p>
             <a:fld id="{8DC4806F-8A57-40BE-A78D-79608F060769}" type="datetimeFigureOut">
               <a:rPr kumimoji="1" lang="ja-JP" altLang="en-US" smtClean="0"/>
-              <a:t>2026/10/15</a:t>
+              <a:t>2026/10/20</a:t>
             </a:fld>
             <a:endParaRPr kumimoji="1" lang="ja-JP" altLang="en-US"/>
           </a:p>
@@ -2037,7 +2039,7 @@
           <a:p>
             <a:fld id="{8DC4806F-8A57-40BE-A78D-79608F060769}" type="datetimeFigureOut">
               <a:rPr kumimoji="1" lang="ja-JP" altLang="en-US" smtClean="0"/>
-              <a:t>2026/10/15</a:t>
+              <a:t>2026/10/20</a:t>
             </a:fld>
             <a:endParaRPr kumimoji="1" lang="ja-JP" altLang="en-US"/>
           </a:p>
@@ -2378,7 +2380,7 @@
           <a:p>
             <a:fld id="{8DC4806F-8A57-40BE-A78D-79608F060769}" type="datetimeFigureOut">
               <a:rPr kumimoji="1" lang="ja-JP" altLang="en-US" smtClean="0"/>
-              <a:t>2026/10/15</a:t>
+              <a:t>2026/10/20</a:t>
             </a:fld>
             <a:endParaRPr kumimoji="1" lang="ja-JP" altLang="en-US"/>
           </a:p>
@@ -2949,7 +2951,7 @@
           <a:p>
             <a:fld id="{8DC4806F-8A57-40BE-A78D-79608F060769}" type="datetimeFigureOut">
               <a:rPr kumimoji="1" lang="ja-JP" altLang="en-US" smtClean="0"/>
-              <a:t>2026/10/15</a:t>
+              <a:t>2026/10/20</a:t>
             </a:fld>
             <a:endParaRPr kumimoji="1" lang="ja-JP" altLang="en-US"/>
           </a:p>
@@ -3194,7 +3196,7 @@
           <a:p>
             <a:fld id="{8DC4806F-8A57-40BE-A78D-79608F060769}" type="datetimeFigureOut">
               <a:rPr kumimoji="1" lang="ja-JP" altLang="en-US" smtClean="0"/>
-              <a:t>2026/10/15</a:t>
+              <a:t>2026/10/20</a:t>
             </a:fld>
             <a:endParaRPr kumimoji="1" lang="ja-JP" altLang="en-US"/>
           </a:p>
@@ -3585,7 +3587,7 @@
           <a:p>
             <a:fld id="{8DC4806F-8A57-40BE-A78D-79608F060769}" type="datetimeFigureOut">
               <a:rPr kumimoji="1" lang="ja-JP" altLang="en-US" smtClean="0"/>
-              <a:t>2026/10/15</a:t>
+              <a:t>2026/10/20</a:t>
             </a:fld>
             <a:endParaRPr kumimoji="1" lang="ja-JP" altLang="en-US"/>
           </a:p>
@@ -4109,7 +4111,7 @@
           <a:p>
             <a:fld id="{8DC4806F-8A57-40BE-A78D-79608F060769}" type="datetimeFigureOut">
               <a:rPr kumimoji="1" lang="ja-JP" altLang="en-US" smtClean="0"/>
-              <a:t>2026/10/15</a:t>
+              <a:t>2026/10/20</a:t>
             </a:fld>
             <a:endParaRPr kumimoji="1" lang="ja-JP" altLang="en-US"/>
           </a:p>
@@ -4417,7 +4419,7 @@
           <a:p>
             <a:fld id="{8DC4806F-8A57-40BE-A78D-79608F060769}" type="datetimeFigureOut">
               <a:rPr kumimoji="1" lang="ja-JP" altLang="en-US" smtClean="0"/>
-              <a:t>2026/10/15</a:t>
+              <a:t>2026/10/20</a:t>
             </a:fld>
             <a:endParaRPr kumimoji="1" lang="ja-JP" altLang="en-US"/>
           </a:p>
@@ -4752,7 +4754,7 @@
           <a:p>
             <a:fld id="{8DC4806F-8A57-40BE-A78D-79608F060769}" type="datetimeFigureOut">
               <a:rPr kumimoji="1" lang="ja-JP" altLang="en-US" smtClean="0"/>
-              <a:t>2026/10/15</a:t>
+              <a:t>2026/10/20</a:t>
             </a:fld>
             <a:endParaRPr kumimoji="1" lang="ja-JP" altLang="en-US"/>
           </a:p>
@@ -5097,7 +5099,7 @@
           <a:p>
             <a:fld id="{8DC4806F-8A57-40BE-A78D-79608F060769}" type="datetimeFigureOut">
               <a:rPr kumimoji="1" lang="ja-JP" altLang="en-US" smtClean="0"/>
-              <a:t>2026/10/15</a:t>
+              <a:t>2026/10/20</a:t>
             </a:fld>
             <a:endParaRPr kumimoji="1" lang="ja-JP" altLang="en-US"/>
           </a:p>
@@ -5350,7 +5352,7 @@
           <a:p>
             <a:fld id="{8DC4806F-8A57-40BE-A78D-79608F060769}" type="datetimeFigureOut">
               <a:rPr kumimoji="1" lang="ja-JP" altLang="en-US" smtClean="0"/>
-              <a:t>2026/10/15</a:t>
+              <a:t>2026/10/20</a:t>
             </a:fld>
             <a:endParaRPr kumimoji="1" lang="ja-JP" altLang="en-US"/>
           </a:p>
@@ -5737,7 +5739,7 @@
           <a:p>
             <a:fld id="{8DC4806F-8A57-40BE-A78D-79608F060769}" type="datetimeFigureOut">
               <a:rPr kumimoji="1" lang="ja-JP" altLang="en-US" smtClean="0"/>
-              <a:t>2026/10/15</a:t>
+              <a:t>2026/10/20</a:t>
             </a:fld>
             <a:endParaRPr kumimoji="1" lang="ja-JP" altLang="en-US"/>
           </a:p>
@@ -6265,7 +6267,7 @@
           <a:p>
             <a:fld id="{8DC4806F-8A57-40BE-A78D-79608F060769}" type="datetimeFigureOut">
               <a:rPr kumimoji="1" lang="ja-JP" altLang="en-US" smtClean="0"/>
-              <a:t>2026/10/15</a:t>
+              <a:t>2026/10/20</a:t>
             </a:fld>
             <a:endParaRPr kumimoji="1" lang="ja-JP" altLang="en-US"/>
           </a:p>
@@ -6378,7 +6380,7 @@
           <a:p>
             <a:fld id="{8DC4806F-8A57-40BE-A78D-79608F060769}" type="datetimeFigureOut">
               <a:rPr kumimoji="1" lang="ja-JP" altLang="en-US" smtClean="0"/>
-              <a:t>2026/10/15</a:t>
+              <a:t>2026/10/20</a:t>
             </a:fld>
             <a:endParaRPr kumimoji="1" lang="ja-JP" altLang="en-US"/>
           </a:p>
@@ -6611,7 +6613,7 @@
           <a:p>
             <a:fld id="{8DC4806F-8A57-40BE-A78D-79608F060769}" type="datetimeFigureOut">
               <a:rPr kumimoji="1" lang="ja-JP" altLang="en-US" smtClean="0"/>
-              <a:t>2026/10/15</a:t>
+              <a:t>2026/10/20</a:t>
             </a:fld>
             <a:endParaRPr kumimoji="1" lang="ja-JP" altLang="en-US"/>
           </a:p>
@@ -7045,7 +7047,7 @@
           <a:p>
             <a:fld id="{8DC4806F-8A57-40BE-A78D-79608F060769}" type="datetimeFigureOut">
               <a:rPr kumimoji="1" lang="ja-JP" altLang="en-US" smtClean="0"/>
-              <a:t>2026/10/15</a:t>
+              <a:t>2026/10/20</a:t>
             </a:fld>
             <a:endParaRPr kumimoji="1" lang="ja-JP" altLang="en-US"/>
           </a:p>
@@ -7365,7 +7367,7 @@
           <a:p>
             <a:fld id="{8DC4806F-8A57-40BE-A78D-79608F060769}" type="datetimeFigureOut">
               <a:rPr kumimoji="1" lang="ja-JP" altLang="en-US" smtClean="0"/>
-              <a:t>2026/10/15</a:t>
+              <a:t>2026/10/20</a:t>
             </a:fld>
             <a:endParaRPr kumimoji="1" lang="ja-JP" altLang="en-US"/>
           </a:p>
@@ -7666,7 +7668,7 @@
           <a:p>
             <a:fld id="{8DC4806F-8A57-40BE-A78D-79608F060769}" type="datetimeFigureOut">
               <a:rPr kumimoji="1" lang="ja-JP" altLang="en-US" smtClean="0"/>
-              <a:t>2026/10/15</a:t>
+              <a:t>2026/10/20</a:t>
             </a:fld>
             <a:endParaRPr kumimoji="1" lang="ja-JP" altLang="en-US"/>
           </a:p>
@@ -7954,7 +7956,7 @@
           <a:p>
             <a:fld id="{8DC4806F-8A57-40BE-A78D-79608F060769}" type="datetimeFigureOut">
               <a:rPr kumimoji="1" lang="ja-JP" altLang="en-US" smtClean="0"/>
-              <a:t>2026/10/15</a:t>
+              <a:t>2026/10/20</a:t>
             </a:fld>
             <a:endParaRPr kumimoji="1" lang="ja-JP" altLang="en-US"/>
           </a:p>
@@ -8301,7 +8303,7 @@
           <a:p>
             <a:fld id="{8DC4806F-8A57-40BE-A78D-79608F060769}" type="datetimeFigureOut">
               <a:rPr kumimoji="1" lang="ja-JP" altLang="en-US" smtClean="0"/>
-              <a:t>2026/10/15</a:t>
+              <a:t>2026/10/20</a:t>
             </a:fld>
             <a:endParaRPr kumimoji="1" lang="ja-JP" altLang="en-US"/>
           </a:p>
@@ -8734,7 +8736,7 @@
           <a:p>
             <a:fld id="{8DC4806F-8A57-40BE-A78D-79608F060769}" type="datetimeFigureOut">
               <a:rPr kumimoji="1" lang="ja-JP" altLang="en-US" smtClean="0"/>
-              <a:t>2026/10/15</a:t>
+              <a:t>2026/10/20</a:t>
             </a:fld>
             <a:endParaRPr kumimoji="1" lang="ja-JP" altLang="en-US"/>
           </a:p>
@@ -9074,7 +9076,7 @@
           <a:p>
             <a:fld id="{8DC4806F-8A57-40BE-A78D-79608F060769}" type="datetimeFigureOut">
               <a:rPr kumimoji="1" lang="ja-JP" altLang="en-US" smtClean="0"/>
-              <a:t>2026/10/15</a:t>
+              <a:t>2026/10/20</a:t>
             </a:fld>
             <a:endParaRPr kumimoji="1" lang="ja-JP" altLang="en-US"/>
           </a:p>
@@ -9457,7 +9459,7 @@
           <a:p>
             <a:fld id="{8DC4806F-8A57-40BE-A78D-79608F060769}" type="datetimeFigureOut">
               <a:rPr kumimoji="1" lang="ja-JP" altLang="en-US" smtClean="0"/>
-              <a:t>2026/10/15</a:t>
+              <a:t>2026/10/20</a:t>
             </a:fld>
             <a:endParaRPr kumimoji="1" lang="ja-JP" altLang="en-US"/>
           </a:p>
@@ -9836,7 +9838,7 @@
           <a:p>
             <a:fld id="{8DC4806F-8A57-40BE-A78D-79608F060769}" type="datetimeFigureOut">
               <a:rPr kumimoji="1" lang="ja-JP" altLang="en-US" smtClean="0"/>
-              <a:t>2026/10/15</a:t>
+              <a:t>2026/10/20</a:t>
             </a:fld>
             <a:endParaRPr kumimoji="1" lang="ja-JP" altLang="en-US"/>
           </a:p>
@@ -10437,6 +10439,738 @@
 <file path=ppt/slides/slide2.xml><?xml version="1.0" encoding="utf-8"?>
 <p:sld xmlns:a="http://schemas.openxmlformats.org/drawingml/2006/main" xmlns:r="http://schemas.openxmlformats.org/officeDocument/2006/relationships" xmlns:p="http://schemas.openxmlformats.org/presentationml/2006/main">
   <p:cSld>
+    <p:bg>
+      <p:bgPr>
+        <a:solidFill>
+          <a:schemeClr val="tx1"/>
+        </a:solidFill>
+        <a:effectLst/>
+      </p:bgPr>
+    </p:bg>
+    <p:spTree>
+      <p:nvGrpSpPr>
+        <p:cNvPr id="1" name="">
+          <a:extLst>
+            <a:ext uri="{FF2B5EF4-FFF2-40B4-BE49-F238E27FC236}">
+              <a16:creationId xmlns:a16="http://schemas.microsoft.com/office/drawing/2014/main" id="{55CE0243-5D54-B0D4-A614-3B89D2D46DBB}"/>
+            </a:ext>
+          </a:extLst>
+        </p:cNvPr>
+        <p:cNvGrpSpPr/>
+        <p:nvPr/>
+      </p:nvGrpSpPr>
+      <p:grpSpPr>
+        <a:xfrm>
+          <a:off x="0" y="0"/>
+          <a:ext cx="0" cy="0"/>
+          <a:chOff x="0" y="0"/>
+          <a:chExt cx="0" cy="0"/>
+        </a:xfrm>
+      </p:grpSpPr>
+      <p:sp>
+        <p:nvSpPr>
+          <p:cNvPr id="4" name="正方形/長方形 3">
+            <a:extLst>
+              <a:ext uri="{FF2B5EF4-FFF2-40B4-BE49-F238E27FC236}">
+                <a16:creationId xmlns:a16="http://schemas.microsoft.com/office/drawing/2014/main" id="{AAC1827D-7BCF-9208-8395-B69FA80EF557}"/>
+              </a:ext>
+            </a:extLst>
+          </p:cNvPr>
+          <p:cNvSpPr/>
+          <p:nvPr/>
+        </p:nvSpPr>
+        <p:spPr>
+          <a:xfrm>
+            <a:off x="71919" y="174660"/>
+            <a:ext cx="10931703" cy="1756881"/>
+          </a:xfrm>
+          <a:prstGeom prst="rect">
+            <a:avLst/>
+          </a:prstGeom>
+          <a:noFill/>
+          <a:ln>
+            <a:noFill/>
+          </a:ln>
+        </p:spPr>
+        <p:style>
+          <a:lnRef idx="2">
+            <a:schemeClr val="accent1">
+              <a:shade val="15000"/>
+            </a:schemeClr>
+          </a:lnRef>
+          <a:fillRef idx="1">
+            <a:schemeClr val="accent1"/>
+          </a:fillRef>
+          <a:effectRef idx="0">
+            <a:schemeClr val="accent1"/>
+          </a:effectRef>
+          <a:fontRef idx="minor">
+            <a:schemeClr val="lt1"/>
+          </a:fontRef>
+        </p:style>
+        <p:txBody>
+          <a:bodyPr rtlCol="0" anchor="ctr"/>
+          <a:lstStyle/>
+          <a:p>
+            <a:pPr marL="0" marR="0" lvl="0" indent="0" algn="ctr" defTabSz="914400" rtl="0" eaLnBrk="1" fontAlgn="auto" latinLnBrk="0" hangingPunct="1">
+              <a:lnSpc>
+                <a:spcPct val="100000"/>
+              </a:lnSpc>
+              <a:spcBef>
+                <a:spcPts val="0"/>
+              </a:spcBef>
+              <a:spcAft>
+                <a:spcPts val="0"/>
+              </a:spcAft>
+              <a:buClrTx/>
+              <a:buSzTx/>
+              <a:buFontTx/>
+              <a:buNone/>
+              <a:tabLst/>
+              <a:defRPr/>
+            </a:pPr>
+            <a:r>
+              <a:rPr kumimoji="1" lang="ja-JP" altLang="en-US" sz="5400" b="0" i="0" u="none" strike="noStrike" kern="1200" cap="none" spc="0" normalizeH="0" baseline="0" noProof="0" dirty="0">
+                <a:ln>
+                  <a:noFill/>
+                </a:ln>
+                <a:solidFill>
+                  <a:srgbClr val="0070C0"/>
+                </a:solidFill>
+                <a:effectLst/>
+                <a:uLnTx/>
+                <a:uFillTx/>
+                <a:latin typeface="HGP創英角ﾎﾟｯﾌﾟ体" panose="040B0A00000000000000" pitchFamily="50" charset="-128"/>
+                <a:ea typeface="HGP創英角ﾎﾟｯﾌﾟ体" panose="040B0A00000000000000" pitchFamily="50" charset="-128"/>
+                <a:cs typeface="+mn-cs"/>
+              </a:rPr>
+              <a:t>タスク管理システム</a:t>
+            </a:r>
+            <a:r>
+              <a:rPr kumimoji="1" lang="ja-JP" altLang="en-US" sz="3200" b="0" i="0" u="none" strike="noStrike" kern="1200" cap="none" spc="0" normalizeH="0" baseline="0" noProof="0" dirty="0">
+                <a:ln>
+                  <a:noFill/>
+                </a:ln>
+                <a:solidFill>
+                  <a:srgbClr val="0070C0"/>
+                </a:solidFill>
+                <a:effectLst/>
+                <a:uLnTx/>
+                <a:uFillTx/>
+                <a:latin typeface="HGP創英角ﾎﾟｯﾌﾟ体" panose="040B0A00000000000000" pitchFamily="50" charset="-128"/>
+                <a:ea typeface="HGP創英角ﾎﾟｯﾌﾟ体" panose="040B0A00000000000000" pitchFamily="50" charset="-128"/>
+                <a:cs typeface="+mn-cs"/>
+              </a:rPr>
+              <a:t>を作ろうと思った経緯。。。</a:t>
+            </a:r>
+            <a:endParaRPr kumimoji="1" lang="ja-JP" altLang="en-US" sz="5400" b="0" i="0" u="none" strike="noStrike" kern="1200" cap="none" spc="0" normalizeH="0" baseline="0" noProof="0" dirty="0">
+              <a:ln>
+                <a:noFill/>
+              </a:ln>
+              <a:solidFill>
+                <a:srgbClr val="0070C0"/>
+              </a:solidFill>
+              <a:effectLst/>
+              <a:uLnTx/>
+              <a:uFillTx/>
+              <a:latin typeface="HGP創英角ﾎﾟｯﾌﾟ体" panose="040B0A00000000000000" pitchFamily="50" charset="-128"/>
+              <a:ea typeface="HGP創英角ﾎﾟｯﾌﾟ体" panose="040B0A00000000000000" pitchFamily="50" charset="-128"/>
+              <a:cs typeface="+mn-cs"/>
+            </a:endParaRPr>
+          </a:p>
+        </p:txBody>
+      </p:sp>
+      <p:sp>
+        <p:nvSpPr>
+          <p:cNvPr id="3" name="正方形/長方形 2">
+            <a:extLst>
+              <a:ext uri="{FF2B5EF4-FFF2-40B4-BE49-F238E27FC236}">
+                <a16:creationId xmlns:a16="http://schemas.microsoft.com/office/drawing/2014/main" id="{8571A34C-277C-6945-E93B-9A59C9D96EE4}"/>
+              </a:ext>
+            </a:extLst>
+          </p:cNvPr>
+          <p:cNvSpPr/>
+          <p:nvPr/>
+        </p:nvSpPr>
+        <p:spPr>
+          <a:xfrm>
+            <a:off x="513709" y="1417832"/>
+            <a:ext cx="11209104" cy="5085709"/>
+          </a:xfrm>
+          <a:prstGeom prst="rect">
+            <a:avLst/>
+          </a:prstGeom>
+          <a:noFill/>
+          <a:ln>
+            <a:noFill/>
+          </a:ln>
+        </p:spPr>
+        <p:style>
+          <a:lnRef idx="2">
+            <a:schemeClr val="accent1">
+              <a:shade val="15000"/>
+            </a:schemeClr>
+          </a:lnRef>
+          <a:fillRef idx="1">
+            <a:schemeClr val="accent1"/>
+          </a:fillRef>
+          <a:effectRef idx="0">
+            <a:schemeClr val="accent1"/>
+          </a:effectRef>
+          <a:fontRef idx="minor">
+            <a:schemeClr val="lt1"/>
+          </a:fontRef>
+        </p:style>
+        <p:txBody>
+          <a:bodyPr rtlCol="0" anchor="ctr"/>
+          <a:lstStyle/>
+          <a:p>
+            <a:pPr lvl="0">
+              <a:defRPr/>
+            </a:pPr>
+            <a:endParaRPr kumimoji="1" lang="en-US" altLang="ja-JP" sz="2800" dirty="0">
+              <a:solidFill>
+                <a:srgbClr val="171717"/>
+              </a:solidFill>
+              <a:latin typeface="HGP創英角ﾎﾟｯﾌﾟ体" panose="040B0A00000000000000" pitchFamily="50" charset="-128"/>
+              <a:ea typeface="HGP創英角ﾎﾟｯﾌﾟ体" panose="040B0A00000000000000" pitchFamily="50" charset="-128"/>
+            </a:endParaRPr>
+          </a:p>
+          <a:p>
+            <a:pPr lvl="0">
+              <a:defRPr/>
+            </a:pPr>
+            <a:r>
+              <a:rPr kumimoji="1" lang="ja-JP" altLang="en-US" sz="2800" dirty="0">
+                <a:solidFill>
+                  <a:srgbClr val="171717"/>
+                </a:solidFill>
+                <a:latin typeface="HGP創英角ﾎﾟｯﾌﾟ体" panose="040B0A00000000000000" pitchFamily="50" charset="-128"/>
+                <a:ea typeface="HGP創英角ﾎﾟｯﾌﾟ体" panose="040B0A00000000000000" pitchFamily="50" charset="-128"/>
+              </a:rPr>
+              <a:t>★自身の仕事も自分の中だけで進めているとミスが起きた時にも</a:t>
+            </a:r>
+            <a:endParaRPr kumimoji="1" lang="en-US" altLang="ja-JP" sz="2800" dirty="0">
+              <a:solidFill>
+                <a:srgbClr val="171717"/>
+              </a:solidFill>
+              <a:latin typeface="HGP創英角ﾎﾟｯﾌﾟ体" panose="040B0A00000000000000" pitchFamily="50" charset="-128"/>
+              <a:ea typeface="HGP創英角ﾎﾟｯﾌﾟ体" panose="040B0A00000000000000" pitchFamily="50" charset="-128"/>
+            </a:endParaRPr>
+          </a:p>
+          <a:p>
+            <a:pPr lvl="0">
+              <a:defRPr/>
+            </a:pPr>
+            <a:r>
+              <a:rPr kumimoji="1" lang="ja-JP" altLang="en-US" sz="2800" dirty="0">
+                <a:solidFill>
+                  <a:srgbClr val="171717"/>
+                </a:solidFill>
+                <a:latin typeface="HGP創英角ﾎﾟｯﾌﾟ体" panose="040B0A00000000000000" pitchFamily="50" charset="-128"/>
+                <a:ea typeface="HGP創英角ﾎﾟｯﾌﾟ体" panose="040B0A00000000000000" pitchFamily="50" charset="-128"/>
+              </a:rPr>
+              <a:t>　フィードバックやアドバイスをもらいにくく、改善しにくいと感じる。</a:t>
+            </a:r>
+            <a:endParaRPr kumimoji="1" lang="en-US" altLang="ja-JP" sz="2800" dirty="0">
+              <a:solidFill>
+                <a:srgbClr val="171717"/>
+              </a:solidFill>
+              <a:latin typeface="HGP創英角ﾎﾟｯﾌﾟ体" panose="040B0A00000000000000" pitchFamily="50" charset="-128"/>
+              <a:ea typeface="HGP創英角ﾎﾟｯﾌﾟ体" panose="040B0A00000000000000" pitchFamily="50" charset="-128"/>
+            </a:endParaRPr>
+          </a:p>
+          <a:p>
+            <a:pPr lvl="0">
+              <a:defRPr/>
+            </a:pPr>
+            <a:r>
+              <a:rPr kumimoji="1" lang="ja-JP" altLang="en-US" sz="2800" dirty="0">
+                <a:solidFill>
+                  <a:srgbClr val="171717"/>
+                </a:solidFill>
+                <a:latin typeface="HGP創英角ﾎﾟｯﾌﾟ体" panose="040B0A00000000000000" pitchFamily="50" charset="-128"/>
+                <a:ea typeface="HGP創英角ﾎﾟｯﾌﾟ体" panose="040B0A00000000000000" pitchFamily="50" charset="-128"/>
+              </a:rPr>
+              <a:t>　そのため、</a:t>
+            </a:r>
+            <a:r>
+              <a:rPr kumimoji="1" lang="ja-JP" altLang="en-US" sz="2800" dirty="0">
+                <a:solidFill>
+                  <a:srgbClr val="FF0000"/>
+                </a:solidFill>
+                <a:latin typeface="HGP創英角ﾎﾟｯﾌﾟ体" panose="040B0A00000000000000" pitchFamily="50" charset="-128"/>
+                <a:ea typeface="HGP創英角ﾎﾟｯﾌﾟ体" panose="040B0A00000000000000" pitchFamily="50" charset="-128"/>
+              </a:rPr>
+              <a:t>見える化し期限や優先順位をつける</a:t>
+            </a:r>
+            <a:r>
+              <a:rPr kumimoji="1" lang="ja-JP" altLang="en-US" sz="2800" dirty="0">
+                <a:solidFill>
+                  <a:schemeClr val="bg1"/>
+                </a:solidFill>
+                <a:latin typeface="HGP創英角ﾎﾟｯﾌﾟ体" panose="040B0A00000000000000" pitchFamily="50" charset="-128"/>
+                <a:ea typeface="HGP創英角ﾎﾟｯﾌﾟ体" panose="040B0A00000000000000" pitchFamily="50" charset="-128"/>
+              </a:rPr>
+              <a:t>こと</a:t>
+            </a:r>
+            <a:r>
+              <a:rPr kumimoji="1" lang="ja-JP" altLang="en-US" sz="2800" dirty="0">
+                <a:solidFill>
+                  <a:srgbClr val="171717"/>
+                </a:solidFill>
+                <a:latin typeface="HGP創英角ﾎﾟｯﾌﾟ体" panose="040B0A00000000000000" pitchFamily="50" charset="-128"/>
+                <a:ea typeface="HGP創英角ﾎﾟｯﾌﾟ体" panose="040B0A00000000000000" pitchFamily="50" charset="-128"/>
+              </a:rPr>
+              <a:t>でミスや漏れを</a:t>
+            </a:r>
+            <a:endParaRPr kumimoji="1" lang="en-US" altLang="ja-JP" sz="2800" dirty="0">
+              <a:solidFill>
+                <a:srgbClr val="171717"/>
+              </a:solidFill>
+              <a:latin typeface="HGP創英角ﾎﾟｯﾌﾟ体" panose="040B0A00000000000000" pitchFamily="50" charset="-128"/>
+              <a:ea typeface="HGP創英角ﾎﾟｯﾌﾟ体" panose="040B0A00000000000000" pitchFamily="50" charset="-128"/>
+            </a:endParaRPr>
+          </a:p>
+          <a:p>
+            <a:pPr lvl="0">
+              <a:defRPr/>
+            </a:pPr>
+            <a:r>
+              <a:rPr kumimoji="1" lang="ja-JP" altLang="en-US" sz="2800" dirty="0">
+                <a:solidFill>
+                  <a:srgbClr val="171717"/>
+                </a:solidFill>
+                <a:latin typeface="HGP創英角ﾎﾟｯﾌﾟ体" panose="040B0A00000000000000" pitchFamily="50" charset="-128"/>
+                <a:ea typeface="HGP創英角ﾎﾟｯﾌﾟ体" panose="040B0A00000000000000" pitchFamily="50" charset="-128"/>
+              </a:rPr>
+              <a:t>　なくすこと。また、周りから進め方等についてもアドバイスを</a:t>
+            </a:r>
+            <a:endParaRPr kumimoji="1" lang="en-US" altLang="ja-JP" sz="2800" dirty="0">
+              <a:solidFill>
+                <a:srgbClr val="171717"/>
+              </a:solidFill>
+              <a:latin typeface="HGP創英角ﾎﾟｯﾌﾟ体" panose="040B0A00000000000000" pitchFamily="50" charset="-128"/>
+              <a:ea typeface="HGP創英角ﾎﾟｯﾌﾟ体" panose="040B0A00000000000000" pitchFamily="50" charset="-128"/>
+            </a:endParaRPr>
+          </a:p>
+          <a:p>
+            <a:pPr lvl="0">
+              <a:defRPr/>
+            </a:pPr>
+            <a:r>
+              <a:rPr kumimoji="1" lang="ja-JP" altLang="en-US" sz="2800" dirty="0">
+                <a:solidFill>
+                  <a:srgbClr val="171717"/>
+                </a:solidFill>
+                <a:latin typeface="HGP創英角ﾎﾟｯﾌﾟ体" panose="040B0A00000000000000" pitchFamily="50" charset="-128"/>
+                <a:ea typeface="HGP創英角ﾎﾟｯﾌﾟ体" panose="040B0A00000000000000" pitchFamily="50" charset="-128"/>
+              </a:rPr>
+              <a:t>　もらうことができる。</a:t>
+            </a:r>
+            <a:endParaRPr kumimoji="1" lang="en-US" altLang="ja-JP" sz="2800" dirty="0">
+              <a:solidFill>
+                <a:srgbClr val="171717"/>
+              </a:solidFill>
+              <a:latin typeface="HGP創英角ﾎﾟｯﾌﾟ体" panose="040B0A00000000000000" pitchFamily="50" charset="-128"/>
+              <a:ea typeface="HGP創英角ﾎﾟｯﾌﾟ体" panose="040B0A00000000000000" pitchFamily="50" charset="-128"/>
+            </a:endParaRPr>
+          </a:p>
+          <a:p>
+            <a:pPr marL="0" marR="0" lvl="0" indent="0" algn="l" defTabSz="914400" rtl="0" eaLnBrk="1" fontAlgn="auto" latinLnBrk="0" hangingPunct="1">
+              <a:lnSpc>
+                <a:spcPct val="100000"/>
+              </a:lnSpc>
+              <a:spcBef>
+                <a:spcPts val="0"/>
+              </a:spcBef>
+              <a:spcAft>
+                <a:spcPts val="0"/>
+              </a:spcAft>
+              <a:buClrTx/>
+              <a:buSzTx/>
+              <a:buFontTx/>
+              <a:buNone/>
+              <a:tabLst/>
+              <a:defRPr/>
+            </a:pPr>
+            <a:endParaRPr kumimoji="1" lang="en-US" altLang="ja-JP" sz="2800" b="0" i="0" u="none" strike="noStrike" kern="1200" cap="none" spc="0" normalizeH="0" baseline="0" noProof="0" dirty="0">
+              <a:ln>
+                <a:noFill/>
+              </a:ln>
+              <a:solidFill>
+                <a:srgbClr val="171717"/>
+              </a:solidFill>
+              <a:effectLst/>
+              <a:uLnTx/>
+              <a:uFillTx/>
+              <a:latin typeface="HGP創英角ﾎﾟｯﾌﾟ体" panose="040B0A00000000000000" pitchFamily="50" charset="-128"/>
+              <a:ea typeface="HGP創英角ﾎﾟｯﾌﾟ体" panose="040B0A00000000000000" pitchFamily="50" charset="-128"/>
+              <a:cs typeface="+mn-cs"/>
+            </a:endParaRPr>
+          </a:p>
+          <a:p>
+            <a:pPr marL="0" marR="0" lvl="0" indent="0" algn="l" defTabSz="914400" rtl="0" eaLnBrk="1" fontAlgn="auto" latinLnBrk="0" hangingPunct="1">
+              <a:lnSpc>
+                <a:spcPct val="100000"/>
+              </a:lnSpc>
+              <a:spcBef>
+                <a:spcPts val="0"/>
+              </a:spcBef>
+              <a:spcAft>
+                <a:spcPts val="0"/>
+              </a:spcAft>
+              <a:buClrTx/>
+              <a:buSzTx/>
+              <a:buFontTx/>
+              <a:buNone/>
+              <a:tabLst/>
+              <a:defRPr/>
+            </a:pPr>
+            <a:r>
+              <a:rPr kumimoji="1" lang="ja-JP" altLang="en-US" sz="2800" b="0" i="0" u="none" strike="noStrike" kern="1200" cap="none" spc="0" normalizeH="0" baseline="0" noProof="0" dirty="0">
+                <a:ln>
+                  <a:noFill/>
+                </a:ln>
+                <a:solidFill>
+                  <a:srgbClr val="171717"/>
+                </a:solidFill>
+                <a:effectLst/>
+                <a:uLnTx/>
+                <a:uFillTx/>
+                <a:latin typeface="HGP創英角ﾎﾟｯﾌﾟ体" panose="040B0A00000000000000" pitchFamily="50" charset="-128"/>
+                <a:ea typeface="HGP創英角ﾎﾟｯﾌﾟ体" panose="040B0A00000000000000" pitchFamily="50" charset="-128"/>
+                <a:cs typeface="+mn-cs"/>
+              </a:rPr>
+              <a:t>★仕事を進めていく中で、社外の人との接点がなくとも、社内の人とは</a:t>
+            </a:r>
+            <a:endParaRPr kumimoji="1" lang="en-US" altLang="ja-JP" sz="2800" b="0" i="0" u="none" strike="noStrike" kern="1200" cap="none" spc="0" normalizeH="0" baseline="0" noProof="0" dirty="0">
+              <a:ln>
+                <a:noFill/>
+              </a:ln>
+              <a:solidFill>
+                <a:srgbClr val="171717"/>
+              </a:solidFill>
+              <a:effectLst/>
+              <a:uLnTx/>
+              <a:uFillTx/>
+              <a:latin typeface="HGP創英角ﾎﾟｯﾌﾟ体" panose="040B0A00000000000000" pitchFamily="50" charset="-128"/>
+              <a:ea typeface="HGP創英角ﾎﾟｯﾌﾟ体" panose="040B0A00000000000000" pitchFamily="50" charset="-128"/>
+              <a:cs typeface="+mn-cs"/>
+            </a:endParaRPr>
+          </a:p>
+          <a:p>
+            <a:pPr marL="0" marR="0" lvl="0" indent="0" algn="l" defTabSz="914400" rtl="0" eaLnBrk="1" fontAlgn="auto" latinLnBrk="0" hangingPunct="1">
+              <a:lnSpc>
+                <a:spcPct val="100000"/>
+              </a:lnSpc>
+              <a:spcBef>
+                <a:spcPts val="0"/>
+              </a:spcBef>
+              <a:spcAft>
+                <a:spcPts val="0"/>
+              </a:spcAft>
+              <a:buClrTx/>
+              <a:buSzTx/>
+              <a:buFontTx/>
+              <a:buNone/>
+              <a:tabLst/>
+              <a:defRPr/>
+            </a:pPr>
+            <a:r>
+              <a:rPr kumimoji="1" lang="ja-JP" altLang="en-US" sz="2800" dirty="0">
+                <a:solidFill>
+                  <a:srgbClr val="171717"/>
+                </a:solidFill>
+                <a:latin typeface="HGP創英角ﾎﾟｯﾌﾟ体" panose="040B0A00000000000000" pitchFamily="50" charset="-128"/>
+                <a:ea typeface="HGP創英角ﾎﾟｯﾌﾟ体" panose="040B0A00000000000000" pitchFamily="50" charset="-128"/>
+              </a:rPr>
+              <a:t>　共に</a:t>
+            </a:r>
+            <a:r>
+              <a:rPr kumimoji="1" lang="ja-JP" altLang="en-US" sz="2800" dirty="0">
+                <a:solidFill>
+                  <a:srgbClr val="FF0000"/>
+                </a:solidFill>
+                <a:latin typeface="HGP創英角ﾎﾟｯﾌﾟ体" panose="040B0A00000000000000" pitchFamily="50" charset="-128"/>
+                <a:ea typeface="HGP創英角ﾎﾟｯﾌﾟ体" panose="040B0A00000000000000" pitchFamily="50" charset="-128"/>
+              </a:rPr>
+              <a:t>早く・いい仕事をしていく必要</a:t>
+            </a:r>
+            <a:r>
+              <a:rPr kumimoji="1" lang="ja-JP" altLang="en-US" sz="2800" dirty="0">
+                <a:solidFill>
+                  <a:srgbClr val="171717"/>
+                </a:solidFill>
+                <a:latin typeface="HGP創英角ﾎﾟｯﾌﾟ体" panose="040B0A00000000000000" pitchFamily="50" charset="-128"/>
+                <a:ea typeface="HGP創英角ﾎﾟｯﾌﾟ体" panose="040B0A00000000000000" pitchFamily="50" charset="-128"/>
+              </a:rPr>
+              <a:t>があると考えている。</a:t>
+            </a:r>
+            <a:endParaRPr kumimoji="1" lang="en-US" altLang="ja-JP" sz="2800" dirty="0">
+              <a:solidFill>
+                <a:srgbClr val="171717"/>
+              </a:solidFill>
+              <a:latin typeface="HGP創英角ﾎﾟｯﾌﾟ体" panose="040B0A00000000000000" pitchFamily="50" charset="-128"/>
+              <a:ea typeface="HGP創英角ﾎﾟｯﾌﾟ体" panose="040B0A00000000000000" pitchFamily="50" charset="-128"/>
+            </a:endParaRPr>
+          </a:p>
+          <a:p>
+            <a:pPr marL="0" marR="0" lvl="0" indent="0" algn="l" defTabSz="914400" rtl="0" eaLnBrk="1" fontAlgn="auto" latinLnBrk="0" hangingPunct="1">
+              <a:lnSpc>
+                <a:spcPct val="100000"/>
+              </a:lnSpc>
+              <a:spcBef>
+                <a:spcPts val="0"/>
+              </a:spcBef>
+              <a:spcAft>
+                <a:spcPts val="0"/>
+              </a:spcAft>
+              <a:buClrTx/>
+              <a:buSzTx/>
+              <a:buFontTx/>
+              <a:buNone/>
+              <a:tabLst/>
+              <a:defRPr/>
+            </a:pPr>
+            <a:r>
+              <a:rPr kumimoji="1" lang="ja-JP" altLang="en-US" sz="2800" b="0" i="0" u="none" strike="noStrike" kern="1200" cap="none" spc="0" normalizeH="0" baseline="0" noProof="0" dirty="0">
+                <a:ln>
+                  <a:noFill/>
+                </a:ln>
+                <a:solidFill>
+                  <a:srgbClr val="171717"/>
+                </a:solidFill>
+                <a:effectLst/>
+                <a:uLnTx/>
+                <a:uFillTx/>
+                <a:latin typeface="HGP創英角ﾎﾟｯﾌﾟ体" panose="040B0A00000000000000" pitchFamily="50" charset="-128"/>
+                <a:ea typeface="HGP創英角ﾎﾟｯﾌﾟ体" panose="040B0A00000000000000" pitchFamily="50" charset="-128"/>
+                <a:cs typeface="+mn-cs"/>
+              </a:rPr>
+              <a:t>　その中で、進め方の一つとして個々でやるだけでなく</a:t>
+            </a:r>
+            <a:r>
+              <a:rPr kumimoji="1" lang="ja-JP" altLang="en-US" sz="2800" b="0" i="0" u="none" strike="noStrike" kern="1200" cap="none" spc="0" normalizeH="0" baseline="0" noProof="0" dirty="0">
+                <a:ln>
+                  <a:noFill/>
+                </a:ln>
+                <a:solidFill>
+                  <a:srgbClr val="FF0000"/>
+                </a:solidFill>
+                <a:effectLst/>
+                <a:uLnTx/>
+                <a:uFillTx/>
+                <a:latin typeface="HGP創英角ﾎﾟｯﾌﾟ体" panose="040B0A00000000000000" pitchFamily="50" charset="-128"/>
+                <a:ea typeface="HGP創英角ﾎﾟｯﾌﾟ体" panose="040B0A00000000000000" pitchFamily="50" charset="-128"/>
+                <a:cs typeface="+mn-cs"/>
+              </a:rPr>
+              <a:t>チームで進める</a:t>
+            </a:r>
+            <a:endParaRPr kumimoji="1" lang="en-US" altLang="ja-JP" sz="2800" b="0" i="0" u="none" strike="noStrike" kern="1200" cap="none" spc="0" normalizeH="0" baseline="0" noProof="0" dirty="0">
+              <a:ln>
+                <a:noFill/>
+              </a:ln>
+              <a:solidFill>
+                <a:srgbClr val="FF0000"/>
+              </a:solidFill>
+              <a:effectLst/>
+              <a:uLnTx/>
+              <a:uFillTx/>
+              <a:latin typeface="HGP創英角ﾎﾟｯﾌﾟ体" panose="040B0A00000000000000" pitchFamily="50" charset="-128"/>
+              <a:ea typeface="HGP創英角ﾎﾟｯﾌﾟ体" panose="040B0A00000000000000" pitchFamily="50" charset="-128"/>
+              <a:cs typeface="+mn-cs"/>
+            </a:endParaRPr>
+          </a:p>
+          <a:p>
+            <a:pPr marL="0" marR="0" lvl="0" indent="0" algn="l" defTabSz="914400" rtl="0" eaLnBrk="1" fontAlgn="auto" latinLnBrk="0" hangingPunct="1">
+              <a:lnSpc>
+                <a:spcPct val="100000"/>
+              </a:lnSpc>
+              <a:spcBef>
+                <a:spcPts val="0"/>
+              </a:spcBef>
+              <a:spcAft>
+                <a:spcPts val="0"/>
+              </a:spcAft>
+              <a:buClrTx/>
+              <a:buSzTx/>
+              <a:buFontTx/>
+              <a:buNone/>
+              <a:tabLst/>
+              <a:defRPr/>
+            </a:pPr>
+            <a:r>
+              <a:rPr kumimoji="1" lang="ja-JP" altLang="en-US" sz="2800" dirty="0">
+                <a:solidFill>
+                  <a:srgbClr val="FF0000"/>
+                </a:solidFill>
+                <a:latin typeface="HGP創英角ﾎﾟｯﾌﾟ体" panose="040B0A00000000000000" pitchFamily="50" charset="-128"/>
+                <a:ea typeface="HGP創英角ﾎﾟｯﾌﾟ体" panose="040B0A00000000000000" pitchFamily="50" charset="-128"/>
+              </a:rPr>
+              <a:t>　</a:t>
+            </a:r>
+            <a:r>
+              <a:rPr kumimoji="1" lang="ja-JP" altLang="en-US" sz="2800" b="0" i="0" u="none" strike="noStrike" kern="1200" cap="none" spc="0" normalizeH="0" baseline="0" noProof="0" dirty="0">
+                <a:ln>
+                  <a:noFill/>
+                </a:ln>
+                <a:solidFill>
+                  <a:srgbClr val="FF0000"/>
+                </a:solidFill>
+                <a:effectLst/>
+                <a:uLnTx/>
+                <a:uFillTx/>
+                <a:latin typeface="HGP創英角ﾎﾟｯﾌﾟ体" panose="040B0A00000000000000" pitchFamily="50" charset="-128"/>
+                <a:ea typeface="HGP創英角ﾎﾟｯﾌﾟ体" panose="040B0A00000000000000" pitchFamily="50" charset="-128"/>
+                <a:cs typeface="+mn-cs"/>
+              </a:rPr>
+              <a:t>必要</a:t>
+            </a:r>
+            <a:r>
+              <a:rPr kumimoji="1" lang="ja-JP" altLang="en-US" sz="2800" b="0" i="0" u="none" strike="noStrike" kern="1200" cap="none" spc="0" normalizeH="0" baseline="0" noProof="0" dirty="0">
+                <a:ln>
+                  <a:noFill/>
+                </a:ln>
+                <a:solidFill>
+                  <a:srgbClr val="171717"/>
+                </a:solidFill>
+                <a:effectLst/>
+                <a:uLnTx/>
+                <a:uFillTx/>
+                <a:latin typeface="HGP創英角ﾎﾟｯﾌﾟ体" panose="040B0A00000000000000" pitchFamily="50" charset="-128"/>
+                <a:ea typeface="HGP創英角ﾎﾟｯﾌﾟ体" panose="040B0A00000000000000" pitchFamily="50" charset="-128"/>
+                <a:cs typeface="+mn-cs"/>
+              </a:rPr>
+              <a:t>があると思うため、</a:t>
+            </a:r>
+            <a:r>
+              <a:rPr kumimoji="1" lang="ja-JP" altLang="en-US" sz="2800" b="0" i="0" u="none" strike="noStrike" kern="1200" cap="none" spc="0" normalizeH="0" baseline="0" noProof="0" dirty="0">
+                <a:ln>
+                  <a:noFill/>
+                </a:ln>
+                <a:solidFill>
+                  <a:srgbClr val="FF0000"/>
+                </a:solidFill>
+                <a:effectLst/>
+                <a:uLnTx/>
+                <a:uFillTx/>
+                <a:latin typeface="HGP創英角ﾎﾟｯﾌﾟ体" panose="040B0A00000000000000" pitchFamily="50" charset="-128"/>
+                <a:ea typeface="HGP創英角ﾎﾟｯﾌﾟ体" panose="040B0A00000000000000" pitchFamily="50" charset="-128"/>
+                <a:cs typeface="+mn-cs"/>
+              </a:rPr>
+              <a:t>他者からタスクを見える化する</a:t>
+            </a:r>
+            <a:r>
+              <a:rPr kumimoji="1" lang="ja-JP" altLang="en-US" sz="2800" b="0" i="0" u="none" strike="noStrike" kern="1200" cap="none" spc="0" normalizeH="0" baseline="0" noProof="0" dirty="0">
+                <a:ln>
+                  <a:noFill/>
+                </a:ln>
+                <a:solidFill>
+                  <a:srgbClr val="171717"/>
+                </a:solidFill>
+                <a:effectLst/>
+                <a:uLnTx/>
+                <a:uFillTx/>
+                <a:latin typeface="HGP創英角ﾎﾟｯﾌﾟ体" panose="040B0A00000000000000" pitchFamily="50" charset="-128"/>
+                <a:ea typeface="HGP創英角ﾎﾟｯﾌﾟ体" panose="040B0A00000000000000" pitchFamily="50" charset="-128"/>
+                <a:cs typeface="+mn-cs"/>
+              </a:rPr>
+              <a:t>必要があると</a:t>
+            </a:r>
+            <a:endParaRPr kumimoji="1" lang="en-US" altLang="ja-JP" sz="2800" b="0" i="0" u="none" strike="noStrike" kern="1200" cap="none" spc="0" normalizeH="0" baseline="0" noProof="0" dirty="0">
+              <a:ln>
+                <a:noFill/>
+              </a:ln>
+              <a:solidFill>
+                <a:srgbClr val="171717"/>
+              </a:solidFill>
+              <a:effectLst/>
+              <a:uLnTx/>
+              <a:uFillTx/>
+              <a:latin typeface="HGP創英角ﾎﾟｯﾌﾟ体" panose="040B0A00000000000000" pitchFamily="50" charset="-128"/>
+              <a:ea typeface="HGP創英角ﾎﾟｯﾌﾟ体" panose="040B0A00000000000000" pitchFamily="50" charset="-128"/>
+              <a:cs typeface="+mn-cs"/>
+            </a:endParaRPr>
+          </a:p>
+          <a:p>
+            <a:pPr marL="0" marR="0" lvl="0" indent="0" algn="l" defTabSz="914400" rtl="0" eaLnBrk="1" fontAlgn="auto" latinLnBrk="0" hangingPunct="1">
+              <a:lnSpc>
+                <a:spcPct val="100000"/>
+              </a:lnSpc>
+              <a:spcBef>
+                <a:spcPts val="0"/>
+              </a:spcBef>
+              <a:spcAft>
+                <a:spcPts val="0"/>
+              </a:spcAft>
+              <a:buClrTx/>
+              <a:buSzTx/>
+              <a:buFontTx/>
+              <a:buNone/>
+              <a:tabLst/>
+              <a:defRPr/>
+            </a:pPr>
+            <a:r>
+              <a:rPr kumimoji="1" lang="ja-JP" altLang="en-US" sz="2800" noProof="0" dirty="0">
+                <a:solidFill>
+                  <a:srgbClr val="171717"/>
+                </a:solidFill>
+                <a:latin typeface="HGP創英角ﾎﾟｯﾌﾟ体" panose="040B0A00000000000000" pitchFamily="50" charset="-128"/>
+                <a:ea typeface="HGP創英角ﾎﾟｯﾌﾟ体" panose="040B0A00000000000000" pitchFamily="50" charset="-128"/>
+              </a:rPr>
+              <a:t>　</a:t>
+            </a:r>
+            <a:r>
+              <a:rPr kumimoji="1" lang="ja-JP" altLang="en-US" sz="2800" b="0" i="0" u="none" strike="noStrike" kern="1200" cap="none" spc="0" normalizeH="0" baseline="0" noProof="0" dirty="0">
+                <a:ln>
+                  <a:noFill/>
+                </a:ln>
+                <a:solidFill>
+                  <a:srgbClr val="171717"/>
+                </a:solidFill>
+                <a:effectLst/>
+                <a:uLnTx/>
+                <a:uFillTx/>
+                <a:latin typeface="HGP創英角ﾎﾟｯﾌﾟ体" panose="040B0A00000000000000" pitchFamily="50" charset="-128"/>
+                <a:ea typeface="HGP創英角ﾎﾟｯﾌﾟ体" panose="040B0A00000000000000" pitchFamily="50" charset="-128"/>
+                <a:cs typeface="+mn-cs"/>
+              </a:rPr>
+              <a:t>感じたため。</a:t>
+            </a:r>
+            <a:endParaRPr kumimoji="1" lang="en-US" altLang="ja-JP" sz="2800" b="0" i="0" u="none" strike="noStrike" kern="1200" cap="none" spc="0" normalizeH="0" baseline="0" noProof="0" dirty="0">
+              <a:ln>
+                <a:noFill/>
+              </a:ln>
+              <a:solidFill>
+                <a:srgbClr val="171717"/>
+              </a:solidFill>
+              <a:effectLst/>
+              <a:uLnTx/>
+              <a:uFillTx/>
+              <a:latin typeface="HGP創英角ﾎﾟｯﾌﾟ体" panose="040B0A00000000000000" pitchFamily="50" charset="-128"/>
+              <a:ea typeface="HGP創英角ﾎﾟｯﾌﾟ体" panose="040B0A00000000000000" pitchFamily="50" charset="-128"/>
+              <a:cs typeface="+mn-cs"/>
+            </a:endParaRPr>
+          </a:p>
+        </p:txBody>
+      </p:sp>
+    </p:spTree>
+    <p:extLst>
+      <p:ext uri="{BB962C8B-B14F-4D97-AF65-F5344CB8AC3E}">
+        <p14:creationId xmlns:p14="http://schemas.microsoft.com/office/powerpoint/2010/main" val="752222305"/>
+      </p:ext>
+    </p:extLst>
+  </p:cSld>
+  <p:clrMapOvr>
+    <a:masterClrMapping/>
+  </p:clrMapOvr>
+</p:sld>
+</file>
+
+<file path=ppt/slides/slide3.xml><?xml version="1.0" encoding="utf-8"?>
+<p:sld xmlns:a="http://schemas.openxmlformats.org/drawingml/2006/main" xmlns:r="http://schemas.openxmlformats.org/officeDocument/2006/relationships" xmlns:p="http://schemas.openxmlformats.org/presentationml/2006/main">
+  <p:cSld>
     <p:spTree>
       <p:nvGrpSpPr>
         <p:cNvPr id="1" name=""/>
@@ -10612,6 +11346,204 @@
           </p:txBody>
         </p:sp>
       </p:grpSp>
+      <p:sp>
+        <p:nvSpPr>
+          <p:cNvPr id="2" name="四角形: 角を丸くする 1">
+            <a:extLst>
+              <a:ext uri="{FF2B5EF4-FFF2-40B4-BE49-F238E27FC236}">
+                <a16:creationId xmlns:a16="http://schemas.microsoft.com/office/drawing/2014/main" id="{64B1469B-A154-834E-54E5-7155F6E028F2}"/>
+              </a:ext>
+            </a:extLst>
+          </p:cNvPr>
+          <p:cNvSpPr/>
+          <p:nvPr/>
+        </p:nvSpPr>
+        <p:spPr>
+          <a:xfrm>
+            <a:off x="6698750" y="359595"/>
+            <a:ext cx="4161033" cy="1047964"/>
+          </a:xfrm>
+          <a:prstGeom prst="roundRect">
+            <a:avLst/>
+          </a:prstGeom>
+          <a:noFill/>
+          <a:ln>
+            <a:noFill/>
+          </a:ln>
+        </p:spPr>
+        <p:style>
+          <a:lnRef idx="2">
+            <a:schemeClr val="accent1">
+              <a:shade val="15000"/>
+            </a:schemeClr>
+          </a:lnRef>
+          <a:fillRef idx="1">
+            <a:schemeClr val="accent1"/>
+          </a:fillRef>
+          <a:effectRef idx="0">
+            <a:schemeClr val="accent1"/>
+          </a:effectRef>
+          <a:fontRef idx="minor">
+            <a:schemeClr val="lt1"/>
+          </a:fontRef>
+        </p:style>
+        <p:txBody>
+          <a:bodyPr rtlCol="0" anchor="ctr"/>
+          <a:lstStyle/>
+          <a:p>
+            <a:pPr algn="ctr"/>
+            <a:r>
+              <a:rPr kumimoji="1" lang="en-US" altLang="ja-JP" dirty="0">
+                <a:solidFill>
+                  <a:schemeClr val="accent1">
+                    <a:lumMod val="60000"/>
+                    <a:lumOff val="40000"/>
+                  </a:schemeClr>
+                </a:solidFill>
+                <a:latin typeface="HGP創英角ﾎﾟｯﾌﾟ体" panose="040B0A00000000000000" pitchFamily="50" charset="-128"/>
+                <a:ea typeface="HGP創英角ﾎﾟｯﾌﾟ体" panose="040B0A00000000000000" pitchFamily="50" charset="-128"/>
+              </a:rPr>
+              <a:t>※</a:t>
+            </a:r>
+            <a:r>
+              <a:rPr kumimoji="1" lang="ja-JP" altLang="en-US" dirty="0">
+                <a:solidFill>
+                  <a:schemeClr val="accent1">
+                    <a:lumMod val="60000"/>
+                    <a:lumOff val="40000"/>
+                  </a:schemeClr>
+                </a:solidFill>
+                <a:latin typeface="HGP創英角ﾎﾟｯﾌﾟ体" panose="040B0A00000000000000" pitchFamily="50" charset="-128"/>
+                <a:ea typeface="HGP創英角ﾎﾟｯﾌﾟ体" panose="040B0A00000000000000" pitchFamily="50" charset="-128"/>
+              </a:rPr>
+              <a:t>管理者登録はデータベースにて</a:t>
+            </a:r>
+            <a:endParaRPr kumimoji="1" lang="en-US" altLang="ja-JP" dirty="0">
+              <a:solidFill>
+                <a:schemeClr val="accent1">
+                  <a:lumMod val="60000"/>
+                  <a:lumOff val="40000"/>
+                </a:schemeClr>
+              </a:solidFill>
+              <a:latin typeface="HGP創英角ﾎﾟｯﾌﾟ体" panose="040B0A00000000000000" pitchFamily="50" charset="-128"/>
+              <a:ea typeface="HGP創英角ﾎﾟｯﾌﾟ体" panose="040B0A00000000000000" pitchFamily="50" charset="-128"/>
+            </a:endParaRPr>
+          </a:p>
+          <a:p>
+            <a:pPr algn="ctr"/>
+            <a:r>
+              <a:rPr kumimoji="1" lang="ja-JP" altLang="en-US" dirty="0">
+                <a:solidFill>
+                  <a:schemeClr val="accent1">
+                    <a:lumMod val="60000"/>
+                    <a:lumOff val="40000"/>
+                  </a:schemeClr>
+                </a:solidFill>
+                <a:latin typeface="HGP創英角ﾎﾟｯﾌﾟ体" panose="040B0A00000000000000" pitchFamily="50" charset="-128"/>
+                <a:ea typeface="HGP創英角ﾎﾟｯﾌﾟ体" panose="040B0A00000000000000" pitchFamily="50" charset="-128"/>
+              </a:rPr>
+              <a:t>直接登録しておくこと！</a:t>
+            </a:r>
+          </a:p>
+        </p:txBody>
+      </p:sp>
+      <p:sp>
+        <p:nvSpPr>
+          <p:cNvPr id="8" name="テキスト ボックス 7">
+            <a:extLst>
+              <a:ext uri="{FF2B5EF4-FFF2-40B4-BE49-F238E27FC236}">
+                <a16:creationId xmlns:a16="http://schemas.microsoft.com/office/drawing/2014/main" id="{76B99576-BE40-4180-B16F-5153DA3E589F}"/>
+              </a:ext>
+            </a:extLst>
+          </p:cNvPr>
+          <p:cNvSpPr txBox="1"/>
+          <p:nvPr/>
+        </p:nvSpPr>
+        <p:spPr>
+          <a:xfrm>
+            <a:off x="5079715" y="1243441"/>
+            <a:ext cx="6608851" cy="707886"/>
+          </a:xfrm>
+          <a:prstGeom prst="rect">
+            <a:avLst/>
+          </a:prstGeom>
+          <a:noFill/>
+        </p:spPr>
+        <p:txBody>
+          <a:bodyPr wrap="square">
+            <a:spAutoFit/>
+          </a:bodyPr>
+          <a:lstStyle/>
+          <a:p>
+            <a:pPr algn="ctr"/>
+            <a:r>
+              <a:rPr kumimoji="1" lang="ja-JP" altLang="en-US" sz="2000" dirty="0">
+                <a:solidFill>
+                  <a:schemeClr val="accent1">
+                    <a:lumMod val="60000"/>
+                    <a:lumOff val="40000"/>
+                  </a:schemeClr>
+                </a:solidFill>
+                <a:latin typeface="HGP創英角ﾎﾟｯﾌﾟ体" panose="040B0A00000000000000" pitchFamily="50" charset="-128"/>
+                <a:ea typeface="HGP創英角ﾎﾟｯﾌﾟ体" panose="040B0A00000000000000" pitchFamily="50" charset="-128"/>
+              </a:rPr>
+              <a:t>管理者の</a:t>
+            </a:r>
+            <a:r>
+              <a:rPr kumimoji="1" lang="en-US" altLang="ja-JP" sz="2000" dirty="0">
+                <a:solidFill>
+                  <a:schemeClr val="accent1">
+                    <a:lumMod val="60000"/>
+                    <a:lumOff val="40000"/>
+                  </a:schemeClr>
+                </a:solidFill>
+                <a:latin typeface="HGP創英角ﾎﾟｯﾌﾟ体" panose="040B0A00000000000000" pitchFamily="50" charset="-128"/>
+                <a:ea typeface="HGP創英角ﾎﾟｯﾌﾟ体" panose="040B0A00000000000000" pitchFamily="50" charset="-128"/>
+              </a:rPr>
+              <a:t>TOP</a:t>
+            </a:r>
+            <a:r>
+              <a:rPr kumimoji="1" lang="ja-JP" altLang="en-US" sz="2000" dirty="0">
+                <a:solidFill>
+                  <a:schemeClr val="accent1">
+                    <a:lumMod val="60000"/>
+                    <a:lumOff val="40000"/>
+                  </a:schemeClr>
+                </a:solidFill>
+                <a:latin typeface="HGP創英角ﾎﾟｯﾌﾟ体" panose="040B0A00000000000000" pitchFamily="50" charset="-128"/>
+                <a:ea typeface="HGP創英角ﾎﾟｯﾌﾟ体" panose="040B0A00000000000000" pitchFamily="50" charset="-128"/>
+              </a:rPr>
+              <a:t>ページにのみ</a:t>
+            </a:r>
+            <a:endParaRPr kumimoji="1" lang="en-US" altLang="ja-JP" sz="2000" dirty="0">
+              <a:solidFill>
+                <a:schemeClr val="accent1">
+                  <a:lumMod val="60000"/>
+                  <a:lumOff val="40000"/>
+                </a:schemeClr>
+              </a:solidFill>
+              <a:latin typeface="HGP創英角ﾎﾟｯﾌﾟ体" panose="040B0A00000000000000" pitchFamily="50" charset="-128"/>
+              <a:ea typeface="HGP創英角ﾎﾟｯﾌﾟ体" panose="040B0A00000000000000" pitchFamily="50" charset="-128"/>
+            </a:endParaRPr>
+          </a:p>
+          <a:p>
+            <a:pPr algn="ctr"/>
+            <a:r>
+              <a:rPr kumimoji="1" lang="ja-JP" altLang="en-US" sz="2000" dirty="0">
+                <a:solidFill>
+                  <a:schemeClr val="accent1">
+                    <a:lumMod val="60000"/>
+                    <a:lumOff val="40000"/>
+                  </a:schemeClr>
+                </a:solidFill>
+                <a:latin typeface="HGP創英角ﾎﾟｯﾌﾟ体" panose="040B0A00000000000000" pitchFamily="50" charset="-128"/>
+                <a:ea typeface="HGP創英角ﾎﾟｯﾌﾟ体" panose="040B0A00000000000000" pitchFamily="50" charset="-128"/>
+              </a:rPr>
+              <a:t>「社員登録画面」のタブが表示される！</a:t>
+            </a:r>
+          </a:p>
+        </p:txBody>
+      </p:sp>
     </p:spTree>
     <p:extLst>
       <p:ext uri="{BB962C8B-B14F-4D97-AF65-F5344CB8AC3E}">
@@ -10625,7 +11557,7 @@
 </p:sld>
 </file>
 
-<file path=ppt/slides/slide3.xml><?xml version="1.0" encoding="utf-8"?>
+<file path=ppt/slides/slide4.xml><?xml version="1.0" encoding="utf-8"?>
 <p:sld xmlns:a="http://schemas.openxmlformats.org/drawingml/2006/main" xmlns:r="http://schemas.openxmlformats.org/officeDocument/2006/relationships" xmlns:p="http://schemas.openxmlformats.org/presentationml/2006/main">
   <p:cSld>
     <p:spTree>
@@ -11128,7 +12060,7 @@
 </p:sld>
 </file>
 
-<file path=ppt/slides/slide4.xml><?xml version="1.0" encoding="utf-8"?>
+<file path=ppt/slides/slide5.xml><?xml version="1.0" encoding="utf-8"?>
 <p:sld xmlns:a="http://schemas.openxmlformats.org/drawingml/2006/main" xmlns:r="http://schemas.openxmlformats.org/officeDocument/2006/relationships" xmlns:p="http://schemas.openxmlformats.org/presentationml/2006/main">
   <p:cSld>
     <p:spTree>
@@ -11560,7 +12492,7 @@
 </p:sld>
 </file>
 
-<file path=ppt/slides/slide5.xml><?xml version="1.0" encoding="utf-8"?>
+<file path=ppt/slides/slide6.xml><?xml version="1.0" encoding="utf-8"?>
 <p:sld xmlns:a="http://schemas.openxmlformats.org/drawingml/2006/main" xmlns:r="http://schemas.openxmlformats.org/officeDocument/2006/relationships" xmlns:p="http://schemas.openxmlformats.org/presentationml/2006/main">
   <p:cSld>
     <p:spTree>
@@ -11941,7 +12873,850 @@
 </p:sld>
 </file>
 
-<file path=ppt/slides/slide6.xml><?xml version="1.0" encoding="utf-8"?>
+<file path=ppt/slides/slide7.xml><?xml version="1.0" encoding="utf-8"?>
+<p:sld xmlns:a="http://schemas.openxmlformats.org/drawingml/2006/main" xmlns:r="http://schemas.openxmlformats.org/officeDocument/2006/relationships" xmlns:p="http://schemas.openxmlformats.org/presentationml/2006/main">
+  <p:cSld>
+    <p:bg>
+      <p:bgPr>
+        <a:solidFill>
+          <a:schemeClr val="bg1">
+            <a:alpha val="0"/>
+          </a:schemeClr>
+        </a:solidFill>
+        <a:effectLst/>
+      </p:bgPr>
+    </p:bg>
+    <p:spTree>
+      <p:nvGrpSpPr>
+        <p:cNvPr id="1" name="">
+          <a:extLst>
+            <a:ext uri="{FF2B5EF4-FFF2-40B4-BE49-F238E27FC236}">
+              <a16:creationId xmlns:a16="http://schemas.microsoft.com/office/drawing/2014/main" id="{EC6B0735-6595-FEF9-D7AA-4269816DA60D}"/>
+            </a:ext>
+          </a:extLst>
+        </p:cNvPr>
+        <p:cNvGrpSpPr/>
+        <p:nvPr/>
+      </p:nvGrpSpPr>
+      <p:grpSpPr>
+        <a:xfrm>
+          <a:off x="0" y="0"/>
+          <a:ext cx="0" cy="0"/>
+          <a:chOff x="0" y="0"/>
+          <a:chExt cx="0" cy="0"/>
+        </a:xfrm>
+      </p:grpSpPr>
+      <p:sp>
+        <p:nvSpPr>
+          <p:cNvPr id="4" name="正方形/長方形 3">
+            <a:extLst>
+              <a:ext uri="{FF2B5EF4-FFF2-40B4-BE49-F238E27FC236}">
+                <a16:creationId xmlns:a16="http://schemas.microsoft.com/office/drawing/2014/main" id="{412FBD21-3317-656E-B975-605B2D013B11}"/>
+              </a:ext>
+            </a:extLst>
+          </p:cNvPr>
+          <p:cNvSpPr/>
+          <p:nvPr/>
+        </p:nvSpPr>
+        <p:spPr>
+          <a:xfrm>
+            <a:off x="0" y="246580"/>
+            <a:ext cx="5414481" cy="616450"/>
+          </a:xfrm>
+          <a:prstGeom prst="rect">
+            <a:avLst/>
+          </a:prstGeom>
+          <a:noFill/>
+          <a:ln>
+            <a:noFill/>
+          </a:ln>
+        </p:spPr>
+        <p:style>
+          <a:lnRef idx="2">
+            <a:schemeClr val="accent1">
+              <a:shade val="15000"/>
+            </a:schemeClr>
+          </a:lnRef>
+          <a:fillRef idx="1">
+            <a:schemeClr val="accent1"/>
+          </a:fillRef>
+          <a:effectRef idx="0">
+            <a:schemeClr val="accent1"/>
+          </a:effectRef>
+          <a:fontRef idx="minor">
+            <a:schemeClr val="lt1"/>
+          </a:fontRef>
+        </p:style>
+        <p:txBody>
+          <a:bodyPr rtlCol="0" anchor="ctr"/>
+          <a:lstStyle/>
+          <a:p>
+            <a:pPr marL="0" marR="0" lvl="0" indent="0" algn="ctr" defTabSz="914400" rtl="0" eaLnBrk="1" fontAlgn="auto" latinLnBrk="0" hangingPunct="1">
+              <a:lnSpc>
+                <a:spcPct val="100000"/>
+              </a:lnSpc>
+              <a:spcBef>
+                <a:spcPts val="0"/>
+              </a:spcBef>
+              <a:spcAft>
+                <a:spcPts val="0"/>
+              </a:spcAft>
+              <a:buClrTx/>
+              <a:buSzTx/>
+              <a:buFontTx/>
+              <a:buNone/>
+              <a:tabLst/>
+              <a:defRPr/>
+            </a:pPr>
+            <a:r>
+              <a:rPr kumimoji="1" lang="en-US" altLang="ja-JP" sz="5400" b="0" i="0" u="none" strike="noStrike" kern="1200" cap="none" spc="0" normalizeH="0" baseline="0" noProof="0" dirty="0">
+                <a:ln>
+                  <a:noFill/>
+                </a:ln>
+                <a:solidFill>
+                  <a:srgbClr val="0070C0"/>
+                </a:solidFill>
+                <a:effectLst/>
+                <a:uLnTx/>
+                <a:uFillTx/>
+                <a:latin typeface="HGP創英角ﾎﾟｯﾌﾟ体" panose="040B0A00000000000000" pitchFamily="50" charset="-128"/>
+                <a:ea typeface="HGP創英角ﾎﾟｯﾌﾟ体" panose="040B0A00000000000000" pitchFamily="50" charset="-128"/>
+                <a:cs typeface="+mn-cs"/>
+              </a:rPr>
+              <a:t>【</a:t>
+            </a:r>
+            <a:r>
+              <a:rPr kumimoji="1" lang="ja-JP" altLang="en-US" sz="5400" b="0" i="0" u="none" strike="noStrike" kern="1200" cap="none" spc="0" normalizeH="0" baseline="0" noProof="0" dirty="0">
+                <a:ln>
+                  <a:noFill/>
+                </a:ln>
+                <a:solidFill>
+                  <a:srgbClr val="0070C0"/>
+                </a:solidFill>
+                <a:effectLst/>
+                <a:uLnTx/>
+                <a:uFillTx/>
+                <a:latin typeface="HGP創英角ﾎﾟｯﾌﾟ体" panose="040B0A00000000000000" pitchFamily="50" charset="-128"/>
+                <a:ea typeface="HGP創英角ﾎﾟｯﾌﾟ体" panose="040B0A00000000000000" pitchFamily="50" charset="-128"/>
+                <a:cs typeface="+mn-cs"/>
+              </a:rPr>
+              <a:t>機能一覧</a:t>
+            </a:r>
+            <a:r>
+              <a:rPr kumimoji="1" lang="en-US" altLang="ja-JP" sz="5400" b="0" i="0" u="none" strike="noStrike" kern="1200" cap="none" spc="0" normalizeH="0" baseline="0" noProof="0" dirty="0">
+                <a:ln>
+                  <a:noFill/>
+                </a:ln>
+                <a:solidFill>
+                  <a:srgbClr val="0070C0"/>
+                </a:solidFill>
+                <a:effectLst/>
+                <a:uLnTx/>
+                <a:uFillTx/>
+                <a:latin typeface="HGP創英角ﾎﾟｯﾌﾟ体" panose="040B0A00000000000000" pitchFamily="50" charset="-128"/>
+                <a:ea typeface="HGP創英角ﾎﾟｯﾌﾟ体" panose="040B0A00000000000000" pitchFamily="50" charset="-128"/>
+                <a:cs typeface="+mn-cs"/>
+              </a:rPr>
+              <a:t>】</a:t>
+            </a:r>
+            <a:endParaRPr kumimoji="1" lang="ja-JP" altLang="en-US" sz="5400" b="0" i="0" u="none" strike="noStrike" kern="1200" cap="none" spc="0" normalizeH="0" baseline="0" noProof="0" dirty="0">
+              <a:ln>
+                <a:noFill/>
+              </a:ln>
+              <a:solidFill>
+                <a:srgbClr val="0070C0"/>
+              </a:solidFill>
+              <a:effectLst/>
+              <a:uLnTx/>
+              <a:uFillTx/>
+              <a:latin typeface="HGP創英角ﾎﾟｯﾌﾟ体" panose="040B0A00000000000000" pitchFamily="50" charset="-128"/>
+              <a:ea typeface="HGP創英角ﾎﾟｯﾌﾟ体" panose="040B0A00000000000000" pitchFamily="50" charset="-128"/>
+              <a:cs typeface="+mn-cs"/>
+            </a:endParaRPr>
+          </a:p>
+        </p:txBody>
+      </p:sp>
+      <p:sp>
+        <p:nvSpPr>
+          <p:cNvPr id="3" name="正方形/長方形 2">
+            <a:extLst>
+              <a:ext uri="{FF2B5EF4-FFF2-40B4-BE49-F238E27FC236}">
+                <a16:creationId xmlns:a16="http://schemas.microsoft.com/office/drawing/2014/main" id="{ED540B69-5C74-B38C-BCA7-24AEA0539F68}"/>
+              </a:ext>
+            </a:extLst>
+          </p:cNvPr>
+          <p:cNvSpPr/>
+          <p:nvPr/>
+        </p:nvSpPr>
+        <p:spPr>
+          <a:xfrm>
+            <a:off x="339048" y="698644"/>
+            <a:ext cx="11661168" cy="6159356"/>
+          </a:xfrm>
+          <a:prstGeom prst="rect">
+            <a:avLst/>
+          </a:prstGeom>
+          <a:noFill/>
+          <a:ln>
+            <a:noFill/>
+          </a:ln>
+        </p:spPr>
+        <p:style>
+          <a:lnRef idx="2">
+            <a:schemeClr val="accent1">
+              <a:shade val="15000"/>
+            </a:schemeClr>
+          </a:lnRef>
+          <a:fillRef idx="1">
+            <a:schemeClr val="accent1"/>
+          </a:fillRef>
+          <a:effectRef idx="0">
+            <a:schemeClr val="accent1"/>
+          </a:effectRef>
+          <a:fontRef idx="minor">
+            <a:schemeClr val="lt1"/>
+          </a:fontRef>
+        </p:style>
+        <p:txBody>
+          <a:bodyPr rtlCol="0" anchor="ctr"/>
+          <a:lstStyle/>
+          <a:p>
+            <a:pPr marL="0" marR="0" lvl="0" indent="0" algn="l" defTabSz="914400" rtl="0" eaLnBrk="1" fontAlgn="auto" latinLnBrk="0" hangingPunct="1">
+              <a:lnSpc>
+                <a:spcPct val="100000"/>
+              </a:lnSpc>
+              <a:spcBef>
+                <a:spcPts val="0"/>
+              </a:spcBef>
+              <a:spcAft>
+                <a:spcPts val="0"/>
+              </a:spcAft>
+              <a:buClrTx/>
+              <a:buSzTx/>
+              <a:buFontTx/>
+              <a:buNone/>
+              <a:tabLst/>
+              <a:defRPr/>
+            </a:pPr>
+            <a:endParaRPr kumimoji="1" lang="en-US" altLang="ja-JP" sz="2800" b="0" i="0" u="none" strike="noStrike" kern="1200" cap="none" spc="0" normalizeH="0" baseline="0" noProof="0" dirty="0">
+              <a:ln>
+                <a:noFill/>
+              </a:ln>
+              <a:solidFill>
+                <a:srgbClr val="F7F6F3"/>
+              </a:solidFill>
+              <a:effectLst/>
+              <a:uLnTx/>
+              <a:uFillTx/>
+              <a:latin typeface="HGP創英角ﾎﾟｯﾌﾟ体" panose="040B0A00000000000000" pitchFamily="50" charset="-128"/>
+              <a:ea typeface="HGP創英角ﾎﾟｯﾌﾟ体" panose="040B0A00000000000000" pitchFamily="50" charset="-128"/>
+              <a:cs typeface="+mn-cs"/>
+            </a:endParaRPr>
+          </a:p>
+          <a:p>
+            <a:pPr lvl="0"/>
+            <a:r>
+              <a:rPr kumimoji="1" lang="ja-JP" altLang="en-US" sz="2800" b="0" i="0" u="none" strike="noStrike" kern="1200" cap="none" spc="0" normalizeH="0" baseline="0" noProof="0" dirty="0">
+                <a:ln>
+                  <a:noFill/>
+                </a:ln>
+                <a:solidFill>
+                  <a:prstClr val="black"/>
+                </a:solidFill>
+                <a:effectLst/>
+                <a:uLnTx/>
+                <a:uFillTx/>
+                <a:latin typeface="HGP創英角ﾎﾟｯﾌﾟ体" panose="040B0A00000000000000" pitchFamily="50" charset="-128"/>
+                <a:ea typeface="HGP創英角ﾎﾟｯﾌﾟ体" panose="040B0A00000000000000" pitchFamily="50" charset="-128"/>
+                <a:cs typeface="+mn-cs"/>
+              </a:rPr>
+              <a:t>・</a:t>
+            </a:r>
+            <a:r>
+              <a:rPr kumimoji="1" lang="ja-JP" altLang="en-US" sz="2800" dirty="0">
+                <a:solidFill>
+                  <a:srgbClr val="FF0000"/>
+                </a:solidFill>
+                <a:latin typeface="HGP創英角ﾎﾟｯﾌﾟ体" panose="040B0A00000000000000" pitchFamily="50" charset="-128"/>
+                <a:ea typeface="HGP創英角ﾎﾟｯﾌﾟ体" panose="040B0A00000000000000" pitchFamily="50" charset="-128"/>
+              </a:rPr>
+              <a:t>社員情報の登録　</a:t>
+            </a:r>
+            <a:r>
+              <a:rPr kumimoji="1" lang="ja-JP" altLang="en-US" sz="2400" dirty="0">
+                <a:solidFill>
+                  <a:schemeClr val="tx1"/>
+                </a:solidFill>
+                <a:latin typeface="HGP創英角ﾎﾟｯﾌﾟ体" panose="040B0A00000000000000" pitchFamily="50" charset="-128"/>
+                <a:ea typeface="HGP創英角ﾎﾟｯﾌﾟ体" panose="040B0A00000000000000" pitchFamily="50" charset="-128"/>
+              </a:rPr>
+              <a:t>（氏名・カナ・性別・メールアドレス・部署）</a:t>
+            </a:r>
+            <a:endParaRPr kumimoji="1" lang="en-US" altLang="ja-JP" sz="2400" dirty="0">
+              <a:solidFill>
+                <a:schemeClr val="tx1"/>
+              </a:solidFill>
+              <a:latin typeface="HGP創英角ﾎﾟｯﾌﾟ体" panose="040B0A00000000000000" pitchFamily="50" charset="-128"/>
+              <a:ea typeface="HGP創英角ﾎﾟｯﾌﾟ体" panose="040B0A00000000000000" pitchFamily="50" charset="-128"/>
+            </a:endParaRPr>
+          </a:p>
+          <a:p>
+            <a:pPr lvl="0"/>
+            <a:r>
+              <a:rPr kumimoji="1" lang="ja-JP" altLang="en-US" sz="2800" b="0" i="0" u="none" strike="noStrike" kern="1200" cap="none" spc="0" normalizeH="0" baseline="0" noProof="0" dirty="0">
+                <a:ln>
+                  <a:noFill/>
+                </a:ln>
+                <a:solidFill>
+                  <a:prstClr val="black"/>
+                </a:solidFill>
+                <a:effectLst/>
+                <a:uLnTx/>
+                <a:uFillTx/>
+                <a:latin typeface="HGP創英角ﾎﾟｯﾌﾟ体" panose="040B0A00000000000000" pitchFamily="50" charset="-128"/>
+                <a:ea typeface="HGP創英角ﾎﾟｯﾌﾟ体" panose="040B0A00000000000000" pitchFamily="50" charset="-128"/>
+                <a:cs typeface="+mn-cs"/>
+              </a:rPr>
+              <a:t>→これらのデータベースへの登録　 </a:t>
+            </a:r>
+            <a:r>
+              <a:rPr kumimoji="1" lang="en-US" altLang="ja-JP" sz="1700" u="sng" dirty="0">
+                <a:solidFill>
+                  <a:prstClr val="black"/>
+                </a:solidFill>
+                <a:latin typeface="HGP創英角ﾎﾟｯﾌﾟ体" panose="040B0A00000000000000" pitchFamily="50" charset="-128"/>
+                <a:ea typeface="HGP創英角ﾎﾟｯﾌﾟ体" panose="040B0A00000000000000" pitchFamily="50" charset="-128"/>
+              </a:rPr>
+              <a:t>※</a:t>
+            </a:r>
+            <a:r>
+              <a:rPr kumimoji="1" lang="ja-JP" altLang="en-US" sz="1700" u="sng" dirty="0">
+                <a:solidFill>
+                  <a:prstClr val="black"/>
+                </a:solidFill>
+                <a:latin typeface="HGP創英角ﾎﾟｯﾌﾟ体" panose="040B0A00000000000000" pitchFamily="50" charset="-128"/>
+                <a:ea typeface="HGP創英角ﾎﾟｯﾌﾟ体" panose="040B0A00000000000000" pitchFamily="50" charset="-128"/>
+              </a:rPr>
+              <a:t>社員</a:t>
+            </a:r>
+            <a:r>
+              <a:rPr kumimoji="1" lang="en-US" altLang="ja-JP" sz="1700" u="sng" dirty="0">
+                <a:solidFill>
+                  <a:prstClr val="black"/>
+                </a:solidFill>
+                <a:latin typeface="HGP創英角ﾎﾟｯﾌﾟ体" panose="040B0A00000000000000" pitchFamily="50" charset="-128"/>
+                <a:ea typeface="HGP創英角ﾎﾟｯﾌﾟ体" panose="040B0A00000000000000" pitchFamily="50" charset="-128"/>
+              </a:rPr>
+              <a:t>ID</a:t>
+            </a:r>
+            <a:r>
+              <a:rPr kumimoji="1" lang="ja-JP" altLang="en-US" sz="1700" u="sng" dirty="0">
+                <a:solidFill>
+                  <a:prstClr val="black"/>
+                </a:solidFill>
+                <a:latin typeface="HGP創英角ﾎﾟｯﾌﾟ体" panose="040B0A00000000000000" pitchFamily="50" charset="-128"/>
+                <a:ea typeface="HGP創英角ﾎﾟｯﾌﾟ体" panose="040B0A00000000000000" pitchFamily="50" charset="-128"/>
+              </a:rPr>
+              <a:t>・登録日時・更新日時・削除フラグは</a:t>
+            </a:r>
+            <a:r>
+              <a:rPr kumimoji="1" lang="en-US" altLang="ja-JP" sz="1700" u="sng" dirty="0">
+                <a:solidFill>
+                  <a:prstClr val="black"/>
+                </a:solidFill>
+                <a:latin typeface="HGP創英角ﾎﾟｯﾌﾟ体" panose="040B0A00000000000000" pitchFamily="50" charset="-128"/>
+                <a:ea typeface="HGP創英角ﾎﾟｯﾌﾟ体" panose="040B0A00000000000000" pitchFamily="50" charset="-128"/>
+              </a:rPr>
+              <a:t>DB</a:t>
+            </a:r>
+            <a:r>
+              <a:rPr kumimoji="1" lang="ja-JP" altLang="en-US" sz="1700" u="sng" dirty="0">
+                <a:solidFill>
+                  <a:prstClr val="black"/>
+                </a:solidFill>
+                <a:latin typeface="HGP創英角ﾎﾟｯﾌﾟ体" panose="040B0A00000000000000" pitchFamily="50" charset="-128"/>
+                <a:ea typeface="HGP創英角ﾎﾟｯﾌﾟ体" panose="040B0A00000000000000" pitchFamily="50" charset="-128"/>
+              </a:rPr>
+              <a:t>登録時に自動反映</a:t>
+            </a:r>
+            <a:endParaRPr kumimoji="1" lang="en-US" altLang="ja-JP" sz="1700" b="0" i="0" u="sng" strike="noStrike" kern="1200" cap="none" spc="0" normalizeH="0" baseline="0" noProof="0" dirty="0">
+              <a:ln>
+                <a:noFill/>
+              </a:ln>
+              <a:solidFill>
+                <a:prstClr val="black"/>
+              </a:solidFill>
+              <a:effectLst/>
+              <a:uLnTx/>
+              <a:uFillTx/>
+              <a:latin typeface="HGP創英角ﾎﾟｯﾌﾟ体" panose="040B0A00000000000000" pitchFamily="50" charset="-128"/>
+              <a:ea typeface="HGP創英角ﾎﾟｯﾌﾟ体" panose="040B0A00000000000000" pitchFamily="50" charset="-128"/>
+              <a:cs typeface="+mn-cs"/>
+            </a:endParaRPr>
+          </a:p>
+          <a:p>
+            <a:pPr marL="0" marR="0" lvl="0" indent="0" algn="l" defTabSz="914400" rtl="0" eaLnBrk="1" fontAlgn="auto" latinLnBrk="0" hangingPunct="1">
+              <a:lnSpc>
+                <a:spcPct val="100000"/>
+              </a:lnSpc>
+              <a:spcBef>
+                <a:spcPts val="0"/>
+              </a:spcBef>
+              <a:spcAft>
+                <a:spcPts val="0"/>
+              </a:spcAft>
+              <a:buClrTx/>
+              <a:buSzTx/>
+              <a:buFontTx/>
+              <a:buNone/>
+              <a:tabLst/>
+              <a:defRPr/>
+            </a:pPr>
+            <a:endParaRPr kumimoji="1" lang="en-US" altLang="ja-JP" sz="2800" b="0" i="0" u="none" strike="noStrike" kern="1200" cap="none" spc="0" normalizeH="0" baseline="0" noProof="0" dirty="0">
+              <a:ln>
+                <a:noFill/>
+              </a:ln>
+              <a:solidFill>
+                <a:prstClr val="black"/>
+              </a:solidFill>
+              <a:effectLst/>
+              <a:uLnTx/>
+              <a:uFillTx/>
+              <a:latin typeface="HGP創英角ﾎﾟｯﾌﾟ体" panose="040B0A00000000000000" pitchFamily="50" charset="-128"/>
+              <a:ea typeface="HGP創英角ﾎﾟｯﾌﾟ体" panose="040B0A00000000000000" pitchFamily="50" charset="-128"/>
+              <a:cs typeface="+mn-cs"/>
+            </a:endParaRPr>
+          </a:p>
+          <a:p>
+            <a:pPr lvl="0"/>
+            <a:r>
+              <a:rPr kumimoji="1" lang="ja-JP" altLang="en-US" sz="2800" b="0" i="0" u="none" strike="noStrike" kern="1200" cap="none" spc="0" normalizeH="0" baseline="0" noProof="0" dirty="0">
+                <a:ln>
+                  <a:noFill/>
+                </a:ln>
+                <a:solidFill>
+                  <a:prstClr val="black"/>
+                </a:solidFill>
+                <a:effectLst/>
+                <a:uLnTx/>
+                <a:uFillTx/>
+                <a:latin typeface="HGP創英角ﾎﾟｯﾌﾟ体" panose="040B0A00000000000000" pitchFamily="50" charset="-128"/>
+                <a:ea typeface="HGP創英角ﾎﾟｯﾌﾟ体" panose="040B0A00000000000000" pitchFamily="50" charset="-128"/>
+                <a:cs typeface="+mn-cs"/>
+              </a:rPr>
+              <a:t>・</a:t>
+            </a:r>
+            <a:r>
+              <a:rPr kumimoji="1" lang="ja-JP" altLang="en-US" sz="2800" dirty="0">
+                <a:solidFill>
+                  <a:srgbClr val="FF0000"/>
+                </a:solidFill>
+                <a:latin typeface="HGP創英角ﾎﾟｯﾌﾟ体" panose="040B0A00000000000000" pitchFamily="50" charset="-128"/>
+                <a:ea typeface="HGP創英角ﾎﾟｯﾌﾟ体" panose="040B0A00000000000000" pitchFamily="50" charset="-128"/>
+              </a:rPr>
+              <a:t>タスク情報の登録</a:t>
+            </a:r>
+            <a:r>
+              <a:rPr kumimoji="1" lang="ja-JP" altLang="en-US" sz="2400" dirty="0">
+                <a:solidFill>
+                  <a:srgbClr val="FF0000"/>
+                </a:solidFill>
+                <a:latin typeface="HGP創英角ﾎﾟｯﾌﾟ体" panose="040B0A00000000000000" pitchFamily="50" charset="-128"/>
+                <a:ea typeface="HGP創英角ﾎﾟｯﾌﾟ体" panose="040B0A00000000000000" pitchFamily="50" charset="-128"/>
+              </a:rPr>
+              <a:t>　</a:t>
+            </a:r>
+            <a:r>
+              <a:rPr kumimoji="1" lang="ja-JP" altLang="en-US" sz="2400" dirty="0">
+                <a:solidFill>
+                  <a:schemeClr val="tx1"/>
+                </a:solidFill>
+                <a:latin typeface="HGP創英角ﾎﾟｯﾌﾟ体" panose="040B0A00000000000000" pitchFamily="50" charset="-128"/>
+                <a:ea typeface="HGP創英角ﾎﾟｯﾌﾟ体" panose="040B0A00000000000000" pitchFamily="50" charset="-128"/>
+              </a:rPr>
+              <a:t>（タスク名・タスク詳細・優先度（★、★★、★★★）・期限</a:t>
+            </a:r>
+            <a:endParaRPr kumimoji="1" lang="en-US" altLang="ja-JP" sz="2400" dirty="0">
+              <a:solidFill>
+                <a:schemeClr val="tx1"/>
+              </a:solidFill>
+              <a:latin typeface="HGP創英角ﾎﾟｯﾌﾟ体" panose="040B0A00000000000000" pitchFamily="50" charset="-128"/>
+              <a:ea typeface="HGP創英角ﾎﾟｯﾌﾟ体" panose="040B0A00000000000000" pitchFamily="50" charset="-128"/>
+            </a:endParaRPr>
+          </a:p>
+          <a:p>
+            <a:pPr lvl="0"/>
+            <a:r>
+              <a:rPr kumimoji="1" lang="ja-JP" altLang="en-US" sz="2400" dirty="0">
+                <a:solidFill>
+                  <a:schemeClr val="tx1"/>
+                </a:solidFill>
+                <a:latin typeface="HGP創英角ﾎﾟｯﾌﾟ体" panose="040B0A00000000000000" pitchFamily="50" charset="-128"/>
+                <a:ea typeface="HGP創英角ﾎﾟｯﾌﾟ体" panose="040B0A00000000000000" pitchFamily="50" charset="-128"/>
+              </a:rPr>
+              <a:t>　　　　　　　　　　　　　　　　　　　　　　　　ステータス（未着手、対応中、確認中、完了、保留）</a:t>
+            </a:r>
+            <a:endParaRPr kumimoji="1" lang="en-US" altLang="ja-JP" sz="2400" dirty="0">
+              <a:solidFill>
+                <a:schemeClr val="tx1"/>
+              </a:solidFill>
+              <a:latin typeface="HGP創英角ﾎﾟｯﾌﾟ体" panose="040B0A00000000000000" pitchFamily="50" charset="-128"/>
+              <a:ea typeface="HGP創英角ﾎﾟｯﾌﾟ体" panose="040B0A00000000000000" pitchFamily="50" charset="-128"/>
+            </a:endParaRPr>
+          </a:p>
+          <a:p>
+            <a:r>
+              <a:rPr kumimoji="1" lang="ja-JP" altLang="en-US" sz="2800" dirty="0">
+                <a:solidFill>
+                  <a:prstClr val="black"/>
+                </a:solidFill>
+                <a:latin typeface="HGP創英角ﾎﾟｯﾌﾟ体" panose="040B0A00000000000000" pitchFamily="50" charset="-128"/>
+                <a:ea typeface="HGP創英角ﾎﾟｯﾌﾟ体" panose="040B0A00000000000000" pitchFamily="50" charset="-128"/>
+              </a:rPr>
+              <a:t>→これらのデータベースへの登録　 </a:t>
+            </a:r>
+            <a:r>
+              <a:rPr kumimoji="1" lang="en-US" altLang="ja-JP" sz="1700" u="sng" dirty="0">
+                <a:solidFill>
+                  <a:schemeClr val="tx1"/>
+                </a:solidFill>
+                <a:latin typeface="HGP創英角ﾎﾟｯﾌﾟ体" panose="040B0A00000000000000" pitchFamily="50" charset="-128"/>
+                <a:ea typeface="HGP創英角ﾎﾟｯﾌﾟ体" panose="040B0A00000000000000" pitchFamily="50" charset="-128"/>
+              </a:rPr>
+              <a:t>※</a:t>
+            </a:r>
+            <a:r>
+              <a:rPr kumimoji="1" lang="ja-JP" altLang="en-US" sz="1700" u="sng" dirty="0">
+                <a:solidFill>
+                  <a:schemeClr val="tx1"/>
+                </a:solidFill>
+                <a:latin typeface="HGP創英角ﾎﾟｯﾌﾟ体" panose="040B0A00000000000000" pitchFamily="50" charset="-128"/>
+                <a:ea typeface="HGP創英角ﾎﾟｯﾌﾟ体" panose="040B0A00000000000000" pitchFamily="50" charset="-128"/>
+              </a:rPr>
+              <a:t>登録者（社員</a:t>
+            </a:r>
+            <a:r>
+              <a:rPr kumimoji="1" lang="en-US" altLang="ja-JP" sz="1700" u="sng" dirty="0">
+                <a:solidFill>
+                  <a:schemeClr val="tx1"/>
+                </a:solidFill>
+                <a:latin typeface="HGP創英角ﾎﾟｯﾌﾟ体" panose="040B0A00000000000000" pitchFamily="50" charset="-128"/>
+                <a:ea typeface="HGP創英角ﾎﾟｯﾌﾟ体" panose="040B0A00000000000000" pitchFamily="50" charset="-128"/>
+              </a:rPr>
+              <a:t>ID</a:t>
+            </a:r>
+            <a:r>
+              <a:rPr kumimoji="1" lang="ja-JP" altLang="en-US" sz="1700" u="sng" dirty="0">
+                <a:solidFill>
+                  <a:schemeClr val="tx1"/>
+                </a:solidFill>
+                <a:latin typeface="HGP創英角ﾎﾟｯﾌﾟ体" panose="040B0A00000000000000" pitchFamily="50" charset="-128"/>
+                <a:ea typeface="HGP創英角ﾎﾟｯﾌﾟ体" panose="040B0A00000000000000" pitchFamily="50" charset="-128"/>
+              </a:rPr>
+              <a:t>）・登録日時・更新日時は</a:t>
+            </a:r>
+            <a:r>
+              <a:rPr kumimoji="1" lang="en-US" altLang="ja-JP" sz="1700" u="sng" dirty="0">
+                <a:solidFill>
+                  <a:schemeClr val="tx1"/>
+                </a:solidFill>
+                <a:latin typeface="HGP創英角ﾎﾟｯﾌﾟ体" panose="040B0A00000000000000" pitchFamily="50" charset="-128"/>
+                <a:ea typeface="HGP創英角ﾎﾟｯﾌﾟ体" panose="040B0A00000000000000" pitchFamily="50" charset="-128"/>
+              </a:rPr>
+              <a:t>DB</a:t>
+            </a:r>
+            <a:r>
+              <a:rPr kumimoji="1" lang="ja-JP" altLang="en-US" sz="1700" u="sng" dirty="0">
+                <a:solidFill>
+                  <a:schemeClr val="tx1"/>
+                </a:solidFill>
+                <a:latin typeface="HGP創英角ﾎﾟｯﾌﾟ体" panose="040B0A00000000000000" pitchFamily="50" charset="-128"/>
+                <a:ea typeface="HGP創英角ﾎﾟｯﾌﾟ体" panose="040B0A00000000000000" pitchFamily="50" charset="-128"/>
+              </a:rPr>
+              <a:t>登録時に自動反映</a:t>
+            </a:r>
+            <a:endParaRPr kumimoji="1" lang="en-US" altLang="ja-JP" sz="1700" u="sng" dirty="0">
+              <a:solidFill>
+                <a:schemeClr val="tx1"/>
+              </a:solidFill>
+              <a:latin typeface="HGP創英角ﾎﾟｯﾌﾟ体" panose="040B0A00000000000000" pitchFamily="50" charset="-128"/>
+              <a:ea typeface="HGP創英角ﾎﾟｯﾌﾟ体" panose="040B0A00000000000000" pitchFamily="50" charset="-128"/>
+            </a:endParaRPr>
+          </a:p>
+          <a:p>
+            <a:pPr lvl="0"/>
+            <a:endParaRPr kumimoji="1" lang="en-US" altLang="ja-JP" sz="2400" b="0" i="0" u="none" strike="noStrike" kern="1200" cap="none" spc="0" normalizeH="0" baseline="0" noProof="0" dirty="0">
+              <a:ln>
+                <a:noFill/>
+              </a:ln>
+              <a:solidFill>
+                <a:schemeClr val="tx1"/>
+              </a:solidFill>
+              <a:effectLst/>
+              <a:uLnTx/>
+              <a:uFillTx/>
+              <a:latin typeface="HGP創英角ﾎﾟｯﾌﾟ体" panose="040B0A00000000000000" pitchFamily="50" charset="-128"/>
+              <a:ea typeface="HGP創英角ﾎﾟｯﾌﾟ体" panose="040B0A00000000000000" pitchFamily="50" charset="-128"/>
+              <a:cs typeface="+mn-cs"/>
+            </a:endParaRPr>
+          </a:p>
+          <a:p>
+            <a:pPr lvl="0"/>
+            <a:r>
+              <a:rPr kumimoji="1" lang="ja-JP" altLang="en-US" sz="2400" dirty="0">
+                <a:solidFill>
+                  <a:schemeClr val="tx1"/>
+                </a:solidFill>
+                <a:latin typeface="HGP創英角ﾎﾟｯﾌﾟ体" panose="040B0A00000000000000" pitchFamily="50" charset="-128"/>
+                <a:ea typeface="HGP創英角ﾎﾟｯﾌﾟ体" panose="040B0A00000000000000" pitchFamily="50" charset="-128"/>
+              </a:rPr>
+              <a:t>・</a:t>
+            </a:r>
+            <a:r>
+              <a:rPr kumimoji="1" lang="ja-JP" altLang="en-US" sz="2800" dirty="0">
+                <a:solidFill>
+                  <a:srgbClr val="FF0000"/>
+                </a:solidFill>
+                <a:latin typeface="HGP創英角ﾎﾟｯﾌﾟ体" panose="040B0A00000000000000" pitchFamily="50" charset="-128"/>
+                <a:ea typeface="HGP創英角ﾎﾟｯﾌﾟ体" panose="040B0A00000000000000" pitchFamily="50" charset="-128"/>
+              </a:rPr>
+              <a:t>タスクの検索・一覧表示　</a:t>
+            </a:r>
+            <a:r>
+              <a:rPr kumimoji="1" lang="ja-JP" altLang="en-US" sz="2400" dirty="0">
+                <a:solidFill>
+                  <a:schemeClr val="tx1"/>
+                </a:solidFill>
+                <a:latin typeface="HGP創英角ﾎﾟｯﾌﾟ体" panose="040B0A00000000000000" pitchFamily="50" charset="-128"/>
+                <a:ea typeface="HGP創英角ﾎﾟｯﾌﾟ体" panose="040B0A00000000000000" pitchFamily="50" charset="-128"/>
+              </a:rPr>
+              <a:t>（名前・タスク名・優先度・期限（当日、翌日、今週中）・</a:t>
+            </a:r>
+            <a:endParaRPr kumimoji="1" lang="en-US" altLang="ja-JP" sz="2400" dirty="0">
+              <a:solidFill>
+                <a:schemeClr val="tx1"/>
+              </a:solidFill>
+              <a:latin typeface="HGP創英角ﾎﾟｯﾌﾟ体" panose="040B0A00000000000000" pitchFamily="50" charset="-128"/>
+              <a:ea typeface="HGP創英角ﾎﾟｯﾌﾟ体" panose="040B0A00000000000000" pitchFamily="50" charset="-128"/>
+            </a:endParaRPr>
+          </a:p>
+          <a:p>
+            <a:pPr lvl="0"/>
+            <a:r>
+              <a:rPr kumimoji="1" lang="ja-JP" altLang="en-US" sz="2400" dirty="0">
+                <a:solidFill>
+                  <a:schemeClr val="tx1"/>
+                </a:solidFill>
+                <a:latin typeface="HGP創英角ﾎﾟｯﾌﾟ体" panose="040B0A00000000000000" pitchFamily="50" charset="-128"/>
+                <a:ea typeface="HGP創英角ﾎﾟｯﾌﾟ体" panose="040B0A00000000000000" pitchFamily="50" charset="-128"/>
+              </a:rPr>
+              <a:t>　　　　　　　　　　　　　　　　　　　　　　　　　　　　　　　　　　　　　　　　ステータス・更新ボタン）</a:t>
+            </a:r>
+            <a:endParaRPr kumimoji="1" lang="en-US" altLang="ja-JP" sz="2400" dirty="0">
+              <a:solidFill>
+                <a:schemeClr val="tx1"/>
+              </a:solidFill>
+              <a:latin typeface="HGP創英角ﾎﾟｯﾌﾟ体" panose="040B0A00000000000000" pitchFamily="50" charset="-128"/>
+              <a:ea typeface="HGP創英角ﾎﾟｯﾌﾟ体" panose="040B0A00000000000000" pitchFamily="50" charset="-128"/>
+            </a:endParaRPr>
+          </a:p>
+          <a:p>
+            <a:pPr lvl="0" algn="r"/>
+            <a:r>
+              <a:rPr kumimoji="1" lang="ja-JP" altLang="en-US" sz="2400" b="0" i="0" u="none" strike="noStrike" kern="1200" cap="none" spc="0" normalizeH="0" baseline="0" noProof="0" dirty="0">
+                <a:ln>
+                  <a:noFill/>
+                </a:ln>
+                <a:solidFill>
+                  <a:schemeClr val="tx1"/>
+                </a:solidFill>
+                <a:effectLst/>
+                <a:uLnTx/>
+                <a:uFillTx/>
+                <a:latin typeface="HGP創英角ﾎﾟｯﾌﾟ体" panose="040B0A00000000000000" pitchFamily="50" charset="-128"/>
+                <a:ea typeface="HGP創英角ﾎﾟｯﾌﾟ体" panose="040B0A00000000000000" pitchFamily="50" charset="-128"/>
+                <a:cs typeface="+mn-cs"/>
+              </a:rPr>
+              <a:t>　</a:t>
+            </a:r>
+            <a:r>
+              <a:rPr kumimoji="1" lang="en-US" altLang="ja-JP" b="0" i="0" u="sng" strike="noStrike" kern="1200" cap="none" spc="0" normalizeH="0" baseline="0" noProof="0" dirty="0">
+                <a:ln>
+                  <a:noFill/>
+                </a:ln>
+                <a:solidFill>
+                  <a:schemeClr val="tx1"/>
+                </a:solidFill>
+                <a:effectLst/>
+                <a:uLnTx/>
+                <a:uFillTx/>
+                <a:latin typeface="HGP創英角ﾎﾟｯﾌﾟ体" panose="040B0A00000000000000" pitchFamily="50" charset="-128"/>
+                <a:ea typeface="HGP創英角ﾎﾟｯﾌﾟ体" panose="040B0A00000000000000" pitchFamily="50" charset="-128"/>
+                <a:cs typeface="+mn-cs"/>
+              </a:rPr>
+              <a:t>※</a:t>
+            </a:r>
+            <a:r>
+              <a:rPr kumimoji="1" lang="ja-JP" altLang="en-US" b="0" i="0" u="sng" strike="noStrike" kern="1200" cap="none" spc="0" normalizeH="0" baseline="0" noProof="0" dirty="0">
+                <a:ln>
+                  <a:noFill/>
+                </a:ln>
+                <a:solidFill>
+                  <a:schemeClr val="tx1"/>
+                </a:solidFill>
+                <a:effectLst/>
+                <a:uLnTx/>
+                <a:uFillTx/>
+                <a:latin typeface="HGP創英角ﾎﾟｯﾌﾟ体" panose="040B0A00000000000000" pitchFamily="50" charset="-128"/>
+                <a:ea typeface="HGP創英角ﾎﾟｯﾌﾟ体" panose="040B0A00000000000000" pitchFamily="50" charset="-128"/>
+                <a:cs typeface="+mn-cs"/>
+              </a:rPr>
+              <a:t>一般社員は自身ののみ。管理者（上長）は全社員の閲覧可能。</a:t>
+            </a:r>
+            <a:endParaRPr kumimoji="1" lang="en-US" altLang="ja-JP" b="0" i="0" u="sng" strike="noStrike" kern="1200" cap="none" spc="0" normalizeH="0" baseline="0" noProof="0" dirty="0">
+              <a:ln>
+                <a:noFill/>
+              </a:ln>
+              <a:solidFill>
+                <a:schemeClr val="tx1"/>
+              </a:solidFill>
+              <a:effectLst/>
+              <a:uLnTx/>
+              <a:uFillTx/>
+              <a:latin typeface="HGP創英角ﾎﾟｯﾌﾟ体" panose="040B0A00000000000000" pitchFamily="50" charset="-128"/>
+              <a:ea typeface="HGP創英角ﾎﾟｯﾌﾟ体" panose="040B0A00000000000000" pitchFamily="50" charset="-128"/>
+              <a:cs typeface="+mn-cs"/>
+            </a:endParaRPr>
+          </a:p>
+          <a:p>
+            <a:r>
+              <a:rPr kumimoji="1" lang="ja-JP" altLang="en-US" sz="2800" dirty="0">
+                <a:solidFill>
+                  <a:schemeClr val="tx1"/>
+                </a:solidFill>
+                <a:latin typeface="HGP創英角ﾎﾟｯﾌﾟ体" panose="040B0A00000000000000" pitchFamily="50" charset="-128"/>
+                <a:ea typeface="HGP創英角ﾎﾟｯﾌﾟ体" panose="040B0A00000000000000" pitchFamily="50" charset="-128"/>
+              </a:rPr>
+              <a:t>→</a:t>
+            </a:r>
+            <a:r>
+              <a:rPr kumimoji="1" lang="ja-JP" altLang="en-US" sz="2800" dirty="0">
+                <a:solidFill>
+                  <a:srgbClr val="FF0000"/>
+                </a:solidFill>
+                <a:latin typeface="HGP創英角ﾎﾟｯﾌﾟ体" panose="040B0A00000000000000" pitchFamily="50" charset="-128"/>
+                <a:ea typeface="HGP創英角ﾎﾟｯﾌﾟ体" panose="040B0A00000000000000" pitchFamily="50" charset="-128"/>
+              </a:rPr>
+              <a:t>更新ボタンより右記の項目の変更可能</a:t>
+            </a:r>
+            <a:r>
+              <a:rPr kumimoji="1" lang="ja-JP" altLang="en-US" sz="2400" dirty="0">
+                <a:solidFill>
+                  <a:schemeClr val="tx1"/>
+                </a:solidFill>
+                <a:latin typeface="HGP創英角ﾎﾟｯﾌﾟ体" panose="040B0A00000000000000" pitchFamily="50" charset="-128"/>
+                <a:ea typeface="HGP創英角ﾎﾟｯﾌﾟ体" panose="040B0A00000000000000" pitchFamily="50" charset="-128"/>
+              </a:rPr>
+              <a:t>（期限・優先度・ステータス・完了日）</a:t>
+            </a:r>
+            <a:endParaRPr kumimoji="1" lang="en-US" altLang="ja-JP" sz="2400" b="0" i="0" u="sng" strike="noStrike" kern="1200" cap="none" spc="0" normalizeH="0" baseline="0" noProof="0" dirty="0">
+              <a:ln>
+                <a:noFill/>
+              </a:ln>
+              <a:solidFill>
+                <a:schemeClr val="tx1"/>
+              </a:solidFill>
+              <a:effectLst/>
+              <a:uLnTx/>
+              <a:uFillTx/>
+              <a:latin typeface="HGP創英角ﾎﾟｯﾌﾟ体" panose="040B0A00000000000000" pitchFamily="50" charset="-128"/>
+              <a:ea typeface="HGP創英角ﾎﾟｯﾌﾟ体" panose="040B0A00000000000000" pitchFamily="50" charset="-128"/>
+              <a:cs typeface="+mn-cs"/>
+            </a:endParaRPr>
+          </a:p>
+          <a:p>
+            <a:pPr lvl="0"/>
+            <a:endParaRPr kumimoji="1" lang="en-US" altLang="ja-JP" sz="2400" u="sng" dirty="0">
+              <a:solidFill>
+                <a:schemeClr val="tx1"/>
+              </a:solidFill>
+              <a:latin typeface="HGP創英角ﾎﾟｯﾌﾟ体" panose="040B0A00000000000000" pitchFamily="50" charset="-128"/>
+              <a:ea typeface="HGP創英角ﾎﾟｯﾌﾟ体" panose="040B0A00000000000000" pitchFamily="50" charset="-128"/>
+            </a:endParaRPr>
+          </a:p>
+          <a:p>
+            <a:pPr lvl="0"/>
+            <a:r>
+              <a:rPr kumimoji="1" lang="ja-JP" altLang="en-US" sz="2800" dirty="0">
+                <a:solidFill>
+                  <a:schemeClr val="tx1"/>
+                </a:solidFill>
+                <a:latin typeface="HGP創英角ﾎﾟｯﾌﾟ体" panose="040B0A00000000000000" pitchFamily="50" charset="-128"/>
+                <a:ea typeface="HGP創英角ﾎﾟｯﾌﾟ体" panose="040B0A00000000000000" pitchFamily="50" charset="-128"/>
+              </a:rPr>
+              <a:t>・</a:t>
+            </a:r>
+            <a:r>
+              <a:rPr kumimoji="1" lang="ja-JP" altLang="en-US" sz="2800" dirty="0">
+                <a:solidFill>
+                  <a:srgbClr val="FF0000"/>
+                </a:solidFill>
+                <a:latin typeface="HGP創英角ﾎﾟｯﾌﾟ体" panose="040B0A00000000000000" pitchFamily="50" charset="-128"/>
+                <a:ea typeface="HGP創英角ﾎﾟｯﾌﾟ体" panose="040B0A00000000000000" pitchFamily="50" charset="-128"/>
+              </a:rPr>
+              <a:t>当日・翌日が期限のタスクを</a:t>
+            </a:r>
+            <a:r>
+              <a:rPr kumimoji="1" lang="en-US" altLang="ja-JP" sz="2800" dirty="0">
+                <a:solidFill>
+                  <a:srgbClr val="FF0000"/>
+                </a:solidFill>
+                <a:latin typeface="HGP創英角ﾎﾟｯﾌﾟ体" panose="040B0A00000000000000" pitchFamily="50" charset="-128"/>
+                <a:ea typeface="HGP創英角ﾎﾟｯﾌﾟ体" panose="040B0A00000000000000" pitchFamily="50" charset="-128"/>
+              </a:rPr>
+              <a:t>TOP</a:t>
+            </a:r>
+            <a:r>
+              <a:rPr kumimoji="1" lang="ja-JP" altLang="en-US" sz="2800" dirty="0">
+                <a:solidFill>
+                  <a:srgbClr val="FF0000"/>
+                </a:solidFill>
+                <a:latin typeface="HGP創英角ﾎﾟｯﾌﾟ体" panose="040B0A00000000000000" pitchFamily="50" charset="-128"/>
+                <a:ea typeface="HGP創英角ﾎﾟｯﾌﾟ体" panose="040B0A00000000000000" pitchFamily="50" charset="-128"/>
+              </a:rPr>
+              <a:t>ページへ表示</a:t>
+            </a:r>
+            <a:endParaRPr kumimoji="1" lang="en-US" altLang="ja-JP" sz="2800" b="0" i="0" strike="noStrike" kern="1200" cap="none" spc="0" normalizeH="0" baseline="0" noProof="0" dirty="0">
+              <a:ln>
+                <a:noFill/>
+              </a:ln>
+              <a:solidFill>
+                <a:srgbClr val="FF0000"/>
+              </a:solidFill>
+              <a:effectLst/>
+              <a:uLnTx/>
+              <a:uFillTx/>
+              <a:latin typeface="HGP創英角ﾎﾟｯﾌﾟ体" panose="040B0A00000000000000" pitchFamily="50" charset="-128"/>
+              <a:ea typeface="HGP創英角ﾎﾟｯﾌﾟ体" panose="040B0A00000000000000" pitchFamily="50" charset="-128"/>
+              <a:cs typeface="+mn-cs"/>
+            </a:endParaRPr>
+          </a:p>
+        </p:txBody>
+      </p:sp>
+    </p:spTree>
+    <p:extLst>
+      <p:ext uri="{BB962C8B-B14F-4D97-AF65-F5344CB8AC3E}">
+        <p14:creationId xmlns:p14="http://schemas.microsoft.com/office/powerpoint/2010/main" val="3041262461"/>
+      </p:ext>
+    </p:extLst>
+  </p:cSld>
+  <p:clrMapOvr>
+    <a:masterClrMapping/>
+  </p:clrMapOvr>
+</p:sld>
+</file>
+
+<file path=ppt/slides/slide8.xml><?xml version="1.0" encoding="utf-8"?>
 <p:sld xmlns:a="http://schemas.openxmlformats.org/drawingml/2006/main" xmlns:r="http://schemas.openxmlformats.org/officeDocument/2006/relationships" xmlns:p="http://schemas.openxmlformats.org/presentationml/2006/main">
   <p:cSld>
     <p:bg>
